--- a/Foundation_F1/F1-L06_Shadda_Tanwin_Madda_Hamza.pptx
+++ b/Foundation_F1/F1-L06_Shadda_Tanwin_Madda_Hamza.pptx
@@ -526,7 +526,11 @@
           <a:lstStyle/>
           <a:p>
             <a:r>
-              <a:rPr lang="en-US" dirty="0"/>
+              <a:rPr lang="ar-SA" dirty="0">
+                <a:latin typeface="Amiri" pitchFamily="2" charset="-78"/>
+                <a:ea typeface="Amiri" pitchFamily="2" charset="-78"/>
+                <a:cs typeface="Amiri" pitchFamily="2" charset="-78"/>
+              </a:rPr>
               <a:t>LESSON AT A GLANCE — planned for 56 minutes, leaving about 4 minutes for Teams delays.
 0–1 Welcome · 1–2 Lesson map · 2–9 Do Now + answers · 9–10 Objectives · 10–20 New letters and sounds · 20–23 Quick check · 23–27 I Do (formation) · 27–38 We Do (listen, sort, detect) · 38–49 You Do (write, then show-and-say) · 49–54 Feedback · 54–56 Preparation.
 FLEX slides are optional. Use them if the class is moving quickly; otherwise the same activities are on the website for homework.
@@ -625,7 +629,11 @@
           <a:lstStyle/>
           <a:p>
             <a:r>
-              <a:rPr lang="en-US" dirty="0"/>
+              <a:rPr lang="ar-SA" dirty="0">
+                <a:latin typeface="Amiri" pitchFamily="2" charset="-78"/>
+                <a:ea typeface="Amiri" pitchFamily="2" charset="-78"/>
+                <a:cs typeface="Amiri" pitchFamily="2" charset="-78"/>
+              </a:rPr>
               <a:t>ALIF MADDA (website Part 3): the wavy sign above alif (آ) = hamza /ʔ/ + long /ā/. It does not replace every ordinary long ā: بَاب has long ā but no hamza before it, so it uses ordinary alif (website).
 Other website word: آمَنَ ʾāmana — he believed.
 Terminology note (website): “madd” can also mean vowel lengthening in general; here we mean the written character آ.</a:t>
@@ -715,7 +723,11 @@
           <a:lstStyle/>
           <a:p>
             <a:r>
-              <a:rPr lang="en-US" dirty="0"/>
+              <a:rPr lang="ar-SA" dirty="0">
+                <a:latin typeface="Amiri" pitchFamily="2" charset="-78"/>
+                <a:ea typeface="Amiri" pitchFamily="2" charset="-78"/>
+                <a:cs typeface="Amiri" pitchFamily="2" charset="-78"/>
+              </a:rPr>
               <a:t>HAMZA (website Part 4): the glottal stop /ʔ/ — the brief catch in “uh-oh”. Its small head may sit above or below alif, on wāw, on a tooth-like seat, or alone.
 Foundation target (website): RECOGNISE the five shapes أ إ ؤ ئ ء. Choosing the correct seat depends on position and vowels — a later orthography lesson. Avoid shortcuts like “the strongest vowel decides” for every hamza (website).</a:t>
             </a:r>
@@ -1251,7 +1263,11 @@
           <a:lstStyle/>
           <a:p>
             <a:r>
-              <a:rPr lang="en-US" dirty="0"/>
+              <a:rPr lang="ar-SA" dirty="0">
+                <a:latin typeface="Amiri" pitchFamily="2" charset="-78"/>
+                <a:ea typeface="Amiri" pitchFamily="2" charset="-78"/>
+                <a:cs typeface="Amiri" pitchFamily="2" charset="-78"/>
+              </a:rPr>
               <a:t>WEBSITE LISTENING (3 min). Read each word twice; students first write the feature in their books.
 Script: مُعَلِّمٌ. كِتَابٌ. بَابٌ. سَأَلَ.
 Answers (website): 1 shadda · 2 tanwīn · 3 long ā · 4 hamza.</a:t>
@@ -1429,7 +1445,11 @@
           <a:lstStyle/>
           <a:p>
             <a:r>
-              <a:rPr lang="en-US" dirty="0"/>
+              <a:rPr lang="ar-SA" dirty="0">
+                <a:latin typeface="Amiri" pitchFamily="2" charset="-78"/>
+                <a:ea typeface="Amiri" pitchFamily="2" charset="-78"/>
+                <a:cs typeface="Amiri" pitchFamily="2" charset="-78"/>
+              </a:rPr>
               <a:t>WE DO — website game “Mark Detective” (identify the exact focus mark or character inside each word). Words from the website lesson; items chosen so each has ONE main focus mark (إِمَامٌ also has tanwīn — accept both with a reason).</a:t>
             </a:r>
             <a:endParaRPr lang="en-US" dirty="0"/>
@@ -1517,7 +1537,11 @@
           <a:lstStyle/>
           <a:p>
             <a:r>
-              <a:rPr lang="en-US" dirty="0"/>
+              <a:rPr lang="ar-SA" dirty="0">
+                <a:latin typeface="Amiri" pitchFamily="2" charset="-78"/>
+                <a:ea typeface="Amiri" pitchFamily="2" charset="-78"/>
+                <a:cs typeface="Amiri" pitchFamily="2" charset="-78"/>
+              </a:rPr>
               <a:t>WELCOME (1 min) — while students join.
 • Greet each student by name as they arrive: السَّلَامُ عَلَيْكُمْ. Take the register (Pastoral Tracker: attendance 0/1).
 • 2-MINUTE CHECK-IN (SEND training): a private chat to any student who seemed unsettled last lesson — “Are you okay today? 👍 / 👎”.
@@ -1610,7 +1634,11 @@
           <a:lstStyle/>
           <a:p>
             <a:r>
-              <a:rPr lang="en-US" dirty="0"/>
+              <a:rPr lang="ar-SA" dirty="0">
+                <a:latin typeface="Amiri" pitchFamily="2" charset="-78"/>
+                <a:ea typeface="Amiri" pitchFamily="2" charset="-78"/>
+                <a:cs typeface="Amiri" pitchFamily="2" charset="-78"/>
+              </a:rPr>
               <a:t>WE DO — website game “Mark Detective” (identify the exact focus mark or character inside each word). Words from the website lesson; items chosen so each has ONE main focus mark (إِمَامٌ also has tanwīn — accept both with a reason).</a:t>
             </a:r>
             <a:endParaRPr lang="en-US" dirty="0"/>
@@ -1786,7 +1814,11 @@
           <a:lstStyle/>
           <a:p>
             <a:r>
-              <a:rPr lang="en-US" dirty="0"/>
+              <a:rPr lang="ar-SA" dirty="0">
+                <a:latin typeface="Amiri" pitchFamily="2" charset="-78"/>
+                <a:ea typeface="Amiri" pitchFamily="2" charset="-78"/>
+                <a:cs typeface="Amiri" pitchFamily="2" charset="-78"/>
+              </a:rPr>
               <a:t>SPEAKING REHEARSAL (3 min) — website speaking prompts (the Core prompt is teacher-made). No breakout rooms (saves setup time).
 Sequence: ● 10s think → ↔ 45s everyone rehearses their answer aloud with mic muted → ◎ pairs on open mic: name two students (warned in advance); A asks, B answers; the rest of the class types one follow-up question in chat (+ / ?) → ↺ one student summarises the answer they heard.
 Routes: Core uses the Core prompt and stem; Develop the Develop prompts; Stretch the last prompt.
@@ -2870,7 +2902,11 @@
           <a:lstStyle/>
           <a:p>
             <a:r>
-              <a:rPr lang="en-US" dirty="0"/>
+              <a:rPr lang="ar-SA" dirty="0">
+                <a:latin typeface="Amiri" pitchFamily="2" charset="-78"/>
+                <a:ea typeface="Amiri" pitchFamily="2" charset="-78"/>
+                <a:cs typeface="Amiri" pitchFamily="2" charset="-78"/>
+              </a:rPr>
               <a:t>SHADDA (website Part 1): not an extra vowel and not a command to shout — it shows a long or doubled consonant: the first half closes what came before; the second half begins what follows.
 Blend routine (website): in دَرَّسَ, arrive on /r/, hold the closure briefly, then release into /ra/. Do not insert a vowel between the two /r/ timings.
 A shadda changes the MEANING: دَرَسَ he studied → دَرَّسَ he taught.</a:t>
@@ -2960,7 +2996,11 @@
           <a:lstStyle/>
           <a:p>
             <a:r>
-              <a:rPr lang="en-US" dirty="0"/>
+              <a:rPr lang="ar-SA" dirty="0">
+                <a:latin typeface="Amiri" pitchFamily="2" charset="-78"/>
+                <a:ea typeface="Amiri" pitchFamily="2" charset="-78"/>
+                <a:cs typeface="Amiri" pitchFamily="2" charset="-78"/>
+              </a:rPr>
               <a:t>TANWĪN (website Part 2): the pair of marks spells a vowel + final /n/ (/u+n/, /i+n/, /a+n/). The /n/ is heard although no nūn is written.
 Tanwīn fatḥ often has a supporting alif (كِتَابًا) — but not always (e.g. words ending in ة), so do not add alif mechanically.
 Grammar boundary (website): tanwīn is not simply “a/an”; it is a grammatical ending. A noun with الـ does not normally take tanwīn: كِتَابٌ vs الكِتَابُ.
@@ -3447,6 +3487,7 @@
                   <a:srgbClr val="D4AF37"/>
                 </a:solidFill>
                 <a:latin typeface="Amiri" pitchFamily="2" charset="-78"/>
+                <a:ea typeface="Amiri" pitchFamily="2" charset="-78"/>
                 <a:cs typeface="Amiri" pitchFamily="2" charset="-78"/>
               </a:rPr>
               <a:t>م</a:t>
@@ -3653,6 +3694,7 @@
                   <a:srgbClr val="D4AF37"/>
                 </a:solidFill>
                 <a:latin typeface="Amiri" pitchFamily="2" charset="-78"/>
+                <a:ea typeface="Amiri" pitchFamily="2" charset="-78"/>
                 <a:cs typeface="Amiri" pitchFamily="2" charset="-78"/>
               </a:rPr>
               <a:t>الشَّدَّةُ وَالتَّنْوِينُ وَأَلِفُ المَدِّ وَالهَمْزَةُ</a:t>
@@ -3704,6 +3746,7 @@
                   <a:srgbClr val="C6D2E6"/>
                 </a:solidFill>
                 <a:latin typeface="Amiri" pitchFamily="2" charset="-78"/>
+                <a:ea typeface="Amiri" pitchFamily="2" charset="-78"/>
                 <a:cs typeface="Amiri" pitchFamily="2" charset="-78"/>
               </a:rPr>
               <a:t>دَرَّسَ</a:t>
@@ -3730,6 +3773,7 @@
                   <a:srgbClr val="C6D2E6"/>
                 </a:solidFill>
                 <a:latin typeface="Amiri" pitchFamily="2" charset="-78"/>
+                <a:ea typeface="Amiri" pitchFamily="2" charset="-78"/>
                 <a:cs typeface="Amiri" pitchFamily="2" charset="-78"/>
               </a:rPr>
               <a:t>كِتَابٌ</a:t>
@@ -3756,6 +3800,7 @@
                   <a:srgbClr val="C6D2E6"/>
                 </a:solidFill>
                 <a:latin typeface="Amiri" pitchFamily="2" charset="-78"/>
+                <a:ea typeface="Amiri" pitchFamily="2" charset="-78"/>
                 <a:cs typeface="Amiri" pitchFamily="2" charset="-78"/>
               </a:rPr>
               <a:t>آدَم</a:t>
@@ -3782,6 +3827,7 @@
                   <a:srgbClr val="C6D2E6"/>
                 </a:solidFill>
                 <a:latin typeface="Amiri" pitchFamily="2" charset="-78"/>
+                <a:ea typeface="Amiri" pitchFamily="2" charset="-78"/>
                 <a:cs typeface="Amiri" pitchFamily="2" charset="-78"/>
               </a:rPr>
               <a:t>سُؤَال</a:t>
@@ -4214,6 +4260,7 @@
                   <a:srgbClr val="D4AF37"/>
                 </a:solidFill>
                 <a:latin typeface="Amiri" pitchFamily="2" charset="-78"/>
+                <a:ea typeface="Amiri" pitchFamily="2" charset="-78"/>
                 <a:cs typeface="Amiri" pitchFamily="2" charset="-78"/>
               </a:rPr>
               <a:t>م</a:t>
@@ -4534,6 +4581,7 @@
                   <a:srgbClr val="8A6D1E"/>
                 </a:solidFill>
                 <a:latin typeface="Amiri" pitchFamily="2" charset="-78"/>
+                <a:ea typeface="Amiri" pitchFamily="2" charset="-78"/>
                 <a:cs typeface="Amiri" pitchFamily="2" charset="-78"/>
               </a:rPr>
               <a:t>أَلِفُ المَدِّ</a:t>
@@ -4852,6 +4900,7 @@
                   <a:srgbClr val="1B3B6F"/>
                 </a:solidFill>
                 <a:latin typeface="Amiri" pitchFamily="2" charset="-78"/>
+                <a:ea typeface="Amiri" pitchFamily="2" charset="-78"/>
                 <a:cs typeface="Amiri" pitchFamily="2" charset="-78"/>
               </a:rPr>
               <a:t>أَ</a:t>
@@ -4928,6 +4977,7 @@
                   <a:srgbClr val="1B3B6F"/>
                 </a:solidFill>
                 <a:latin typeface="Amiri" pitchFamily="2" charset="-78"/>
+                <a:ea typeface="Amiri" pitchFamily="2" charset="-78"/>
                 <a:cs typeface="Amiri" pitchFamily="2" charset="-78"/>
               </a:rPr>
               <a:t>أَكَلَ</a:t>
@@ -5172,6 +5222,7 @@
                   <a:srgbClr val="1B3B6F"/>
                 </a:solidFill>
                 <a:latin typeface="Amiri" pitchFamily="2" charset="-78"/>
+                <a:ea typeface="Amiri" pitchFamily="2" charset="-78"/>
                 <a:cs typeface="Amiri" pitchFamily="2" charset="-78"/>
               </a:rPr>
               <a:t>آ</a:t>
@@ -5248,6 +5299,7 @@
                   <a:srgbClr val="1B3B6F"/>
                 </a:solidFill>
                 <a:latin typeface="Amiri" pitchFamily="2" charset="-78"/>
+                <a:ea typeface="Amiri" pitchFamily="2" charset="-78"/>
                 <a:cs typeface="Amiri" pitchFamily="2" charset="-78"/>
               </a:rPr>
               <a:t>آدَمُ</a:t>
@@ -5492,6 +5544,7 @@
                   <a:srgbClr val="1B3B6F"/>
                 </a:solidFill>
                 <a:latin typeface="Amiri" pitchFamily="2" charset="-78"/>
+                <a:ea typeface="Amiri" pitchFamily="2" charset="-78"/>
                 <a:cs typeface="Amiri" pitchFamily="2" charset="-78"/>
               </a:rPr>
               <a:t>آ</a:t>
@@ -5568,6 +5621,7 @@
                   <a:srgbClr val="1B3B6F"/>
                 </a:solidFill>
                 <a:latin typeface="Amiri" pitchFamily="2" charset="-78"/>
+                <a:ea typeface="Amiri" pitchFamily="2" charset="-78"/>
                 <a:cs typeface="Amiri" pitchFamily="2" charset="-78"/>
               </a:rPr>
               <a:t>قُرْآنٌ</a:t>
@@ -5812,6 +5866,7 @@
                   <a:srgbClr val="1B3B6F"/>
                 </a:solidFill>
                 <a:latin typeface="Amiri" pitchFamily="2" charset="-78"/>
+                <a:ea typeface="Amiri" pitchFamily="2" charset="-78"/>
                 <a:cs typeface="Amiri" pitchFamily="2" charset="-78"/>
               </a:rPr>
               <a:t>بَا</a:t>
@@ -5888,6 +5943,7 @@
                   <a:srgbClr val="1B3B6F"/>
                 </a:solidFill>
                 <a:latin typeface="Amiri" pitchFamily="2" charset="-78"/>
+                <a:ea typeface="Amiri" pitchFamily="2" charset="-78"/>
                 <a:cs typeface="Amiri" pitchFamily="2" charset="-78"/>
               </a:rPr>
               <a:t>بَابٌ</a:t>
@@ -6135,6 +6191,7 @@
                   <a:srgbClr val="D4AF37"/>
                 </a:solidFill>
                 <a:latin typeface="Amiri" pitchFamily="2" charset="-78"/>
+                <a:ea typeface="Amiri" pitchFamily="2" charset="-78"/>
                 <a:cs typeface="Amiri" pitchFamily="2" charset="-78"/>
               </a:rPr>
               <a:t>م</a:t>
@@ -6455,6 +6512,7 @@
                   <a:srgbClr val="8A6D1E"/>
                 </a:solidFill>
                 <a:latin typeface="Amiri" pitchFamily="2" charset="-78"/>
+                <a:ea typeface="Amiri" pitchFamily="2" charset="-78"/>
                 <a:cs typeface="Amiri" pitchFamily="2" charset="-78"/>
               </a:rPr>
               <a:t>الهَمْزَةُ</a:t>
@@ -6773,6 +6831,7 @@
                   <a:srgbClr val="1B3B6F"/>
                 </a:solidFill>
                 <a:latin typeface="Amiri" pitchFamily="2" charset="-78"/>
+                <a:ea typeface="Amiri" pitchFamily="2" charset="-78"/>
                 <a:cs typeface="Amiri" pitchFamily="2" charset="-78"/>
               </a:rPr>
               <a:t>أ</a:t>
@@ -6849,6 +6908,7 @@
                   <a:srgbClr val="1B3B6F"/>
                 </a:solidFill>
                 <a:latin typeface="Amiri" pitchFamily="2" charset="-78"/>
+                <a:ea typeface="Amiri" pitchFamily="2" charset="-78"/>
                 <a:cs typeface="Amiri" pitchFamily="2" charset="-78"/>
               </a:rPr>
               <a:t>أَكَلَ</a:t>
@@ -7055,6 +7115,7 @@
                   <a:srgbClr val="1B3B6F"/>
                 </a:solidFill>
                 <a:latin typeface="Amiri" pitchFamily="2" charset="-78"/>
+                <a:ea typeface="Amiri" pitchFamily="2" charset="-78"/>
                 <a:cs typeface="Amiri" pitchFamily="2" charset="-78"/>
               </a:rPr>
               <a:t>إ</a:t>
@@ -7131,6 +7192,7 @@
                   <a:srgbClr val="1B3B6F"/>
                 </a:solidFill>
                 <a:latin typeface="Amiri" pitchFamily="2" charset="-78"/>
+                <a:ea typeface="Amiri" pitchFamily="2" charset="-78"/>
                 <a:cs typeface="Amiri" pitchFamily="2" charset="-78"/>
               </a:rPr>
               <a:t>إِمَامٌ</a:t>
@@ -7337,6 +7399,7 @@
                   <a:srgbClr val="1B3B6F"/>
                 </a:solidFill>
                 <a:latin typeface="Amiri" pitchFamily="2" charset="-78"/>
+                <a:ea typeface="Amiri" pitchFamily="2" charset="-78"/>
                 <a:cs typeface="Amiri" pitchFamily="2" charset="-78"/>
               </a:rPr>
               <a:t>ؤ</a:t>
@@ -7413,6 +7476,7 @@
                   <a:srgbClr val="1B3B6F"/>
                 </a:solidFill>
                 <a:latin typeface="Amiri" pitchFamily="2" charset="-78"/>
+                <a:ea typeface="Amiri" pitchFamily="2" charset="-78"/>
                 <a:cs typeface="Amiri" pitchFamily="2" charset="-78"/>
               </a:rPr>
               <a:t>سُؤَالٌ</a:t>
@@ -7619,6 +7683,7 @@
                   <a:srgbClr val="1B3B6F"/>
                 </a:solidFill>
                 <a:latin typeface="Amiri" pitchFamily="2" charset="-78"/>
+                <a:ea typeface="Amiri" pitchFamily="2" charset="-78"/>
                 <a:cs typeface="Amiri" pitchFamily="2" charset="-78"/>
               </a:rPr>
               <a:t>ئ</a:t>
@@ -7695,6 +7760,7 @@
                   <a:srgbClr val="1B3B6F"/>
                 </a:solidFill>
                 <a:latin typeface="Amiri" pitchFamily="2" charset="-78"/>
+                <a:ea typeface="Amiri" pitchFamily="2" charset="-78"/>
                 <a:cs typeface="Amiri" pitchFamily="2" charset="-78"/>
               </a:rPr>
               <a:t>بِئْرٌ</a:t>
@@ -7836,6 +7902,7 @@
                   <a:srgbClr val="1B3B6F"/>
                 </a:solidFill>
                 <a:latin typeface="Amiri" pitchFamily="2" charset="-78"/>
+                <a:ea typeface="Amiri" pitchFamily="2" charset="-78"/>
                 <a:cs typeface="Amiri" pitchFamily="2" charset="-78"/>
               </a:rPr>
               <a:t>ء</a:t>
@@ -7912,6 +7979,7 @@
                   <a:srgbClr val="1B3B6F"/>
                 </a:solidFill>
                 <a:latin typeface="Amiri" pitchFamily="2" charset="-78"/>
+                <a:ea typeface="Amiri" pitchFamily="2" charset="-78"/>
                 <a:cs typeface="Amiri" pitchFamily="2" charset="-78"/>
               </a:rPr>
               <a:t>شَيْءٌ</a:t>
@@ -8121,6 +8189,7 @@
                   <a:srgbClr val="D4AF37"/>
                 </a:solidFill>
                 <a:latin typeface="Amiri" pitchFamily="2" charset="-78"/>
+                <a:ea typeface="Amiri" pitchFamily="2" charset="-78"/>
                 <a:cs typeface="Amiri" pitchFamily="2" charset="-78"/>
               </a:rPr>
               <a:t>م</a:t>
@@ -8441,6 +8510,7 @@
                   <a:srgbClr val="8A6D1E"/>
                 </a:solidFill>
                 <a:latin typeface="Amiri" pitchFamily="2" charset="-78"/>
+                <a:ea typeface="Amiri" pitchFamily="2" charset="-78"/>
                 <a:cs typeface="Amiri" pitchFamily="2" charset="-78"/>
               </a:rPr>
               <a:t>فَحْصٌ سَرِيعٌ</a:t>
@@ -8964,6 +9034,7 @@
                   <a:srgbClr val="1B3B6F"/>
                 </a:solidFill>
                 <a:latin typeface="Amiri" pitchFamily="2" charset="-78"/>
+                <a:ea typeface="Amiri" pitchFamily="2" charset="-78"/>
                 <a:cs typeface="Amiri" pitchFamily="2" charset="-78"/>
               </a:rPr>
               <a:t>كِتَابٌ</a:t>
@@ -9415,6 +9486,7 @@
                   <a:srgbClr val="1B3B6F"/>
                 </a:solidFill>
                 <a:latin typeface="Amiri" pitchFamily="2" charset="-78"/>
+                <a:ea typeface="Amiri" pitchFamily="2" charset="-78"/>
                 <a:cs typeface="Amiri" pitchFamily="2" charset="-78"/>
               </a:rPr>
               <a:t>آ</a:t>
@@ -9778,6 +9850,7 @@
                   <a:srgbClr val="1B3B6F"/>
                 </a:solidFill>
                 <a:latin typeface="Amiri" pitchFamily="2" charset="-78"/>
+                <a:ea typeface="Amiri" pitchFamily="2" charset="-78"/>
                 <a:cs typeface="Amiri" pitchFamily="2" charset="-78"/>
               </a:rPr>
               <a:t>سُؤَال</a:t>
@@ -10113,6 +10186,7 @@
                   <a:srgbClr val="D4AF37"/>
                 </a:solidFill>
                 <a:latin typeface="Amiri" pitchFamily="2" charset="-78"/>
+                <a:ea typeface="Amiri" pitchFamily="2" charset="-78"/>
                 <a:cs typeface="Amiri" pitchFamily="2" charset="-78"/>
               </a:rPr>
               <a:t>م</a:t>
@@ -10433,6 +10507,7 @@
                   <a:srgbClr val="8A6D1E"/>
                 </a:solidFill>
                 <a:latin typeface="Amiri" pitchFamily="2" charset="-78"/>
+                <a:ea typeface="Amiri" pitchFamily="2" charset="-78"/>
                 <a:cs typeface="Amiri" pitchFamily="2" charset="-78"/>
               </a:rPr>
               <a:t>الإِجَابَاتُ وَالتَّعْلِيلُ</a:t>
@@ -11021,6 +11096,7 @@
                   <a:srgbClr val="1B3B6F"/>
                 </a:solidFill>
                 <a:latin typeface="Amiri" pitchFamily="2" charset="-78"/>
+                <a:ea typeface="Amiri" pitchFamily="2" charset="-78"/>
                 <a:cs typeface="Amiri" pitchFamily="2" charset="-78"/>
               </a:rPr>
               <a:t>كِتَابٌ</a:t>
@@ -11537,6 +11613,7 @@
                   <a:srgbClr val="1B3B6F"/>
                 </a:solidFill>
                 <a:latin typeface="Amiri" pitchFamily="2" charset="-78"/>
+                <a:ea typeface="Amiri" pitchFamily="2" charset="-78"/>
                 <a:cs typeface="Amiri" pitchFamily="2" charset="-78"/>
               </a:rPr>
               <a:t>آ</a:t>
@@ -11965,6 +12042,7 @@
                   <a:srgbClr val="1B3B6F"/>
                 </a:solidFill>
                 <a:latin typeface="Amiri" pitchFamily="2" charset="-78"/>
+                <a:ea typeface="Amiri" pitchFamily="2" charset="-78"/>
                 <a:cs typeface="Amiri" pitchFamily="2" charset="-78"/>
               </a:rPr>
               <a:t>سُؤَال</a:t>
@@ -12365,6 +12443,7 @@
                   <a:srgbClr val="D4AF37"/>
                 </a:solidFill>
                 <a:latin typeface="Amiri" pitchFamily="2" charset="-78"/>
+                <a:ea typeface="Amiri" pitchFamily="2" charset="-78"/>
                 <a:cs typeface="Amiri" pitchFamily="2" charset="-78"/>
               </a:rPr>
               <a:t>م</a:t>
@@ -12685,6 +12764,7 @@
                   <a:srgbClr val="8A6D1E"/>
                 </a:solidFill>
                 <a:latin typeface="Amiri" pitchFamily="2" charset="-78"/>
+                <a:ea typeface="Amiri" pitchFamily="2" charset="-78"/>
                 <a:cs typeface="Amiri" pitchFamily="2" charset="-78"/>
               </a:rPr>
               <a:t>مَعْمَلُ القِرَاءَةِ</a:t>
@@ -12788,6 +12868,7 @@
                   <a:srgbClr val="1B3B6F"/>
                 </a:solidFill>
                 <a:latin typeface="Amiri" pitchFamily="2" charset="-78"/>
+                <a:ea typeface="Amiri" pitchFamily="2" charset="-78"/>
                 <a:cs typeface="Amiri" pitchFamily="2" charset="-78"/>
               </a:rPr>
               <a:t>مُحَمَّدٌ</a:t>
@@ -12891,6 +12972,7 @@
                   <a:srgbClr val="1B3B6F"/>
                 </a:solidFill>
                 <a:latin typeface="Amiri" pitchFamily="2" charset="-78"/>
+                <a:ea typeface="Amiri" pitchFamily="2" charset="-78"/>
                 <a:cs typeface="Amiri" pitchFamily="2" charset="-78"/>
               </a:rPr>
               <a:t>بَيْتٌ</a:t>
@@ -12994,6 +13076,7 @@
                   <a:srgbClr val="1B3B6F"/>
                 </a:solidFill>
                 <a:latin typeface="Amiri" pitchFamily="2" charset="-78"/>
+                <a:ea typeface="Amiri" pitchFamily="2" charset="-78"/>
                 <a:cs typeface="Amiri" pitchFamily="2" charset="-78"/>
               </a:rPr>
               <a:t>قَلَمًا</a:t>
@@ -13097,6 +13180,7 @@
                   <a:srgbClr val="1B3B6F"/>
                 </a:solidFill>
                 <a:latin typeface="Amiri" pitchFamily="2" charset="-78"/>
+                <a:ea typeface="Amiri" pitchFamily="2" charset="-78"/>
                 <a:cs typeface="Amiri" pitchFamily="2" charset="-78"/>
               </a:rPr>
               <a:t>آدَمُ</a:t>
@@ -13200,6 +13284,7 @@
                   <a:srgbClr val="1B3B6F"/>
                 </a:solidFill>
                 <a:latin typeface="Amiri" pitchFamily="2" charset="-78"/>
+                <a:ea typeface="Amiri" pitchFamily="2" charset="-78"/>
                 <a:cs typeface="Amiri" pitchFamily="2" charset="-78"/>
               </a:rPr>
               <a:t>سُؤَالٌ</a:t>
@@ -13303,6 +13388,7 @@
                   <a:srgbClr val="1B3B6F"/>
                 </a:solidFill>
                 <a:latin typeface="Amiri" pitchFamily="2" charset="-78"/>
+                <a:ea typeface="Amiri" pitchFamily="2" charset="-78"/>
                 <a:cs typeface="Amiri" pitchFamily="2" charset="-78"/>
               </a:rPr>
               <a:t>دَرَّسَ</a:t>
@@ -13474,6 +13560,7 @@
                   <a:srgbClr val="D4AF37"/>
                 </a:solidFill>
                 <a:latin typeface="Amiri" pitchFamily="2" charset="-78"/>
+                <a:ea typeface="Amiri" pitchFamily="2" charset="-78"/>
                 <a:cs typeface="Amiri" pitchFamily="2" charset="-78"/>
               </a:rPr>
               <a:t>م</a:t>
@@ -13794,6 +13881,7 @@
                   <a:srgbClr val="8A6D1E"/>
                 </a:solidFill>
                 <a:latin typeface="Amiri" pitchFamily="2" charset="-78"/>
+                <a:ea typeface="Amiri" pitchFamily="2" charset="-78"/>
                 <a:cs typeface="Amiri" pitchFamily="2" charset="-78"/>
               </a:rPr>
               <a:t>اِسْتَمِعْ وَاقْرَأْ</a:t>
@@ -14068,6 +14156,7 @@
                   <a:srgbClr val="1F2A37"/>
                 </a:solidFill>
                 <a:latin typeface="Amiri" pitchFamily="2" charset="-78"/>
+                <a:ea typeface="Amiri" pitchFamily="2" charset="-78"/>
                 <a:cs typeface="Amiri" pitchFamily="2" charset="-78"/>
               </a:rPr>
               <a:t>دَرَسَ</a:t>
@@ -14169,6 +14258,7 @@
                   <a:srgbClr val="1F2A37"/>
                 </a:solidFill>
                 <a:latin typeface="Amiri" pitchFamily="2" charset="-78"/>
+                <a:ea typeface="Amiri" pitchFamily="2" charset="-78"/>
                 <a:cs typeface="Amiri" pitchFamily="2" charset="-78"/>
               </a:rPr>
               <a:t>دَرَّسَ</a:t>
@@ -14405,6 +14495,7 @@
                   <a:srgbClr val="1F2A37"/>
                 </a:solidFill>
                 <a:latin typeface="Amiri" pitchFamily="2" charset="-78"/>
+                <a:ea typeface="Amiri" pitchFamily="2" charset="-78"/>
                 <a:cs typeface="Amiri" pitchFamily="2" charset="-78"/>
               </a:rPr>
               <a:t>مُحَمَدٌ</a:t>
@@ -14506,6 +14597,7 @@
                   <a:srgbClr val="1F2A37"/>
                 </a:solidFill>
                 <a:latin typeface="Amiri" pitchFamily="2" charset="-78"/>
+                <a:ea typeface="Amiri" pitchFamily="2" charset="-78"/>
                 <a:cs typeface="Amiri" pitchFamily="2" charset="-78"/>
               </a:rPr>
               <a:t>مُحَمَّدٌ</a:t>
@@ -14654,6 +14746,7 @@
                   <a:srgbClr val="1B3B6F"/>
                 </a:solidFill>
                 <a:latin typeface="Amiri" pitchFamily="2" charset="-78"/>
+                <a:ea typeface="Amiri" pitchFamily="2" charset="-78"/>
                 <a:cs typeface="Amiri" pitchFamily="2" charset="-78"/>
               </a:rPr>
               <a:t>قَلَمٍ</a:t>
@@ -15105,6 +15198,7 @@
                   <a:srgbClr val="1B3B6F"/>
                 </a:solidFill>
                 <a:latin typeface="Amiri" pitchFamily="2" charset="-78"/>
+                <a:ea typeface="Amiri" pitchFamily="2" charset="-78"/>
                 <a:cs typeface="Amiri" pitchFamily="2" charset="-78"/>
               </a:rPr>
               <a:t>بَيْتًا</a:t>
@@ -15556,6 +15650,7 @@
                   <a:srgbClr val="1B3B6F"/>
                 </a:solidFill>
                 <a:latin typeface="Amiri" pitchFamily="2" charset="-78"/>
+                <a:ea typeface="Amiri" pitchFamily="2" charset="-78"/>
                 <a:cs typeface="Amiri" pitchFamily="2" charset="-78"/>
               </a:rPr>
               <a:t>دَرَّسَ</a:t>
@@ -16089,6 +16184,7 @@
                   <a:srgbClr val="D4AF37"/>
                 </a:solidFill>
                 <a:latin typeface="Amiri" pitchFamily="2" charset="-78"/>
+                <a:ea typeface="Amiri" pitchFamily="2" charset="-78"/>
                 <a:cs typeface="Amiri" pitchFamily="2" charset="-78"/>
               </a:rPr>
               <a:t>م</a:t>
@@ -16409,6 +16505,7 @@
                   <a:srgbClr val="8A6D1E"/>
                 </a:solidFill>
                 <a:latin typeface="Amiri" pitchFamily="2" charset="-78"/>
+                <a:ea typeface="Amiri" pitchFamily="2" charset="-78"/>
                 <a:cs typeface="Amiri" pitchFamily="2" charset="-78"/>
               </a:rPr>
               <a:t>الإِجَابَاتُ</a:t>
@@ -16683,6 +16780,7 @@
                   <a:srgbClr val="9AA1AB"/>
                 </a:solidFill>
                 <a:latin typeface="Amiri" pitchFamily="2" charset="-78"/>
+                <a:ea typeface="Amiri" pitchFamily="2" charset="-78"/>
                 <a:cs typeface="Amiri" pitchFamily="2" charset="-78"/>
               </a:rPr>
               <a:t>دَرَسَ</a:t>
@@ -16811,6 +16909,7 @@
                   <a:srgbClr val="1F2A37"/>
                 </a:solidFill>
                 <a:latin typeface="Amiri" pitchFamily="2" charset="-78"/>
+                <a:ea typeface="Amiri" pitchFamily="2" charset="-78"/>
                 <a:cs typeface="Amiri" pitchFamily="2" charset="-78"/>
               </a:rPr>
               <a:t>دَرَّسَ</a:t>
@@ -16862,6 +16961,7 @@
                   <a:srgbClr val="8A6D1E"/>
                 </a:solidFill>
                 <a:latin typeface="Amiri" pitchFamily="2" charset="-78"/>
+                <a:ea typeface="Amiri" pitchFamily="2" charset="-78"/>
                 <a:cs typeface="Amiri" pitchFamily="2" charset="-78"/>
               </a:rPr>
               <a:t>رّ</a:t>
@@ -17111,6 +17211,7 @@
                   <a:srgbClr val="9AA1AB"/>
                 </a:solidFill>
                 <a:latin typeface="Amiri" pitchFamily="2" charset="-78"/>
+                <a:ea typeface="Amiri" pitchFamily="2" charset="-78"/>
                 <a:cs typeface="Amiri" pitchFamily="2" charset="-78"/>
               </a:rPr>
               <a:t>مُحَمَدٌ</a:t>
@@ -17239,6 +17340,7 @@
                   <a:srgbClr val="1F2A37"/>
                 </a:solidFill>
                 <a:latin typeface="Amiri" pitchFamily="2" charset="-78"/>
+                <a:ea typeface="Amiri" pitchFamily="2" charset="-78"/>
                 <a:cs typeface="Amiri" pitchFamily="2" charset="-78"/>
               </a:rPr>
               <a:t>مُحَمَّدٌ</a:t>
@@ -17425,6 +17527,7 @@
                   <a:srgbClr val="1B3B6F"/>
                 </a:solidFill>
                 <a:latin typeface="Amiri" pitchFamily="2" charset="-78"/>
+                <a:ea typeface="Amiri" pitchFamily="2" charset="-78"/>
                 <a:cs typeface="Amiri" pitchFamily="2" charset="-78"/>
               </a:rPr>
               <a:t>قَلَمٍ</a:t>
@@ -17941,6 +18044,7 @@
                   <a:srgbClr val="1B3B6F"/>
                 </a:solidFill>
                 <a:latin typeface="Amiri" pitchFamily="2" charset="-78"/>
+                <a:ea typeface="Amiri" pitchFamily="2" charset="-78"/>
                 <a:cs typeface="Amiri" pitchFamily="2" charset="-78"/>
               </a:rPr>
               <a:t>بَيْتًا</a:t>
@@ -18457,6 +18561,7 @@
                   <a:srgbClr val="1B3B6F"/>
                 </a:solidFill>
                 <a:latin typeface="Amiri" pitchFamily="2" charset="-78"/>
+                <a:ea typeface="Amiri" pitchFamily="2" charset="-78"/>
                 <a:cs typeface="Amiri" pitchFamily="2" charset="-78"/>
               </a:rPr>
               <a:t>دَرَّسَ</a:t>
@@ -19055,6 +19160,7 @@
                   <a:srgbClr val="D4AF37"/>
                 </a:solidFill>
                 <a:latin typeface="Amiri" pitchFamily="2" charset="-78"/>
+                <a:ea typeface="Amiri" pitchFamily="2" charset="-78"/>
                 <a:cs typeface="Amiri" pitchFamily="2" charset="-78"/>
               </a:rPr>
               <a:t>م</a:t>
@@ -19375,6 +19481,7 @@
                   <a:srgbClr val="8A6D1E"/>
                 </a:solidFill>
                 <a:latin typeface="Amiri" pitchFamily="2" charset="-78"/>
+                <a:ea typeface="Amiri" pitchFamily="2" charset="-78"/>
                 <a:cs typeface="Amiri" pitchFamily="2" charset="-78"/>
               </a:rPr>
               <a:t>اِسْتَمِعْ إِلَى العَلَامَةِ</a:t>
@@ -19561,6 +19668,7 @@
                   <a:srgbClr val="1B3B6F"/>
                 </a:solidFill>
                 <a:latin typeface="Amiri" pitchFamily="2" charset="-78"/>
+                <a:ea typeface="Amiri" pitchFamily="2" charset="-78"/>
                 <a:cs typeface="Amiri" pitchFamily="2" charset="-78"/>
               </a:rPr>
               <a:t>مُعَلِّمٌ</a:t>
@@ -20012,6 +20120,7 @@
                   <a:srgbClr val="1B3B6F"/>
                 </a:solidFill>
                 <a:latin typeface="Amiri" pitchFamily="2" charset="-78"/>
+                <a:ea typeface="Amiri" pitchFamily="2" charset="-78"/>
                 <a:cs typeface="Amiri" pitchFamily="2" charset="-78"/>
               </a:rPr>
               <a:t>كِتَابٌ</a:t>
@@ -20463,6 +20572,7 @@
                   <a:srgbClr val="1B3B6F"/>
                 </a:solidFill>
                 <a:latin typeface="Amiri" pitchFamily="2" charset="-78"/>
+                <a:ea typeface="Amiri" pitchFamily="2" charset="-78"/>
                 <a:cs typeface="Amiri" pitchFamily="2" charset="-78"/>
               </a:rPr>
               <a:t>بَابٌ</a:t>
@@ -20914,6 +21024,7 @@
                   <a:srgbClr val="1B3B6F"/>
                 </a:solidFill>
                 <a:latin typeface="Amiri" pitchFamily="2" charset="-78"/>
+                <a:ea typeface="Amiri" pitchFamily="2" charset="-78"/>
                 <a:cs typeface="Amiri" pitchFamily="2" charset="-78"/>
               </a:rPr>
               <a:t>سَأَلَ</a:t>
@@ -21460,6 +21571,7 @@
                   <a:srgbClr val="D4AF37"/>
                 </a:solidFill>
                 <a:latin typeface="Amiri" pitchFamily="2" charset="-78"/>
+                <a:ea typeface="Amiri" pitchFamily="2" charset="-78"/>
                 <a:cs typeface="Amiri" pitchFamily="2" charset="-78"/>
               </a:rPr>
               <a:t>م</a:t>
@@ -21780,6 +21892,7 @@
                   <a:srgbClr val="8A6D1E"/>
                 </a:solidFill>
                 <a:latin typeface="Amiri" pitchFamily="2" charset="-78"/>
+                <a:ea typeface="Amiri" pitchFamily="2" charset="-78"/>
                 <a:cs typeface="Amiri" pitchFamily="2" charset="-78"/>
               </a:rPr>
               <a:t>الإِجَابَاتُ</a:t>
@@ -21966,6 +22079,7 @@
                   <a:srgbClr val="1B3B6F"/>
                 </a:solidFill>
                 <a:latin typeface="Amiri" pitchFamily="2" charset="-78"/>
+                <a:ea typeface="Amiri" pitchFamily="2" charset="-78"/>
                 <a:cs typeface="Amiri" pitchFamily="2" charset="-78"/>
               </a:rPr>
               <a:t>مُعَلِّمٌ</a:t>
@@ -22482,6 +22596,7 @@
                   <a:srgbClr val="1B3B6F"/>
                 </a:solidFill>
                 <a:latin typeface="Amiri" pitchFamily="2" charset="-78"/>
+                <a:ea typeface="Amiri" pitchFamily="2" charset="-78"/>
                 <a:cs typeface="Amiri" pitchFamily="2" charset="-78"/>
               </a:rPr>
               <a:t>كِتَابٌ</a:t>
@@ -22998,6 +23113,7 @@
                   <a:srgbClr val="1B3B6F"/>
                 </a:solidFill>
                 <a:latin typeface="Amiri" pitchFamily="2" charset="-78"/>
+                <a:ea typeface="Amiri" pitchFamily="2" charset="-78"/>
                 <a:cs typeface="Amiri" pitchFamily="2" charset="-78"/>
               </a:rPr>
               <a:t>بَابٌ</a:t>
@@ -23514,6 +23630,7 @@
                   <a:srgbClr val="1B3B6F"/>
                 </a:solidFill>
                 <a:latin typeface="Amiri" pitchFamily="2" charset="-78"/>
+                <a:ea typeface="Amiri" pitchFamily="2" charset="-78"/>
                 <a:cs typeface="Amiri" pitchFamily="2" charset="-78"/>
               </a:rPr>
               <a:t>سَأَلَ</a:t>
@@ -24125,6 +24242,7 @@
                   <a:srgbClr val="D4AF37"/>
                 </a:solidFill>
                 <a:latin typeface="Amiri" pitchFamily="2" charset="-78"/>
+                <a:ea typeface="Amiri" pitchFamily="2" charset="-78"/>
                 <a:cs typeface="Amiri" pitchFamily="2" charset="-78"/>
               </a:rPr>
               <a:t>م</a:t>
@@ -24445,6 +24563,7 @@
                   <a:srgbClr val="8A6D1E"/>
                 </a:solidFill>
                 <a:latin typeface="Amiri" pitchFamily="2" charset="-78"/>
+                <a:ea typeface="Amiri" pitchFamily="2" charset="-78"/>
                 <a:cs typeface="Amiri" pitchFamily="2" charset="-78"/>
               </a:rPr>
               <a:t>مُحَقِّقُ العَلَامَاتِ</a:t>
@@ -24555,6 +24674,7 @@
                   <a:srgbClr val="1B3B6F"/>
                 </a:solidFill>
                 <a:latin typeface="Amiri" pitchFamily="2" charset="-78"/>
+                <a:ea typeface="Amiri" pitchFamily="2" charset="-78"/>
                 <a:cs typeface="Amiri" pitchFamily="2" charset="-78"/>
               </a:rPr>
               <a:t>مَرَّ</a:t>
@@ -24627,6 +24747,7 @@
                   <a:srgbClr val="1B3B6F"/>
                 </a:solidFill>
                 <a:latin typeface="Amiri" pitchFamily="2" charset="-78"/>
+                <a:ea typeface="Amiri" pitchFamily="2" charset="-78"/>
                 <a:cs typeface="Amiri" pitchFamily="2" charset="-78"/>
               </a:rPr>
               <a:t>قَلَمٌ</a:t>
@@ -24699,6 +24820,7 @@
                   <a:srgbClr val="1B3B6F"/>
                 </a:solidFill>
                 <a:latin typeface="Amiri" pitchFamily="2" charset="-78"/>
+                <a:ea typeface="Amiri" pitchFamily="2" charset="-78"/>
                 <a:cs typeface="Amiri" pitchFamily="2" charset="-78"/>
               </a:rPr>
               <a:t>آمَنَ</a:t>
@@ -24771,6 +24893,7 @@
                   <a:srgbClr val="1B3B6F"/>
                 </a:solidFill>
                 <a:latin typeface="Amiri" pitchFamily="2" charset="-78"/>
+                <a:ea typeface="Amiri" pitchFamily="2" charset="-78"/>
                 <a:cs typeface="Amiri" pitchFamily="2" charset="-78"/>
               </a:rPr>
               <a:t>إِمَامٌ</a:t>
@@ -24843,6 +24966,7 @@
                   <a:srgbClr val="1B3B6F"/>
                 </a:solidFill>
                 <a:latin typeface="Amiri" pitchFamily="2" charset="-78"/>
+                <a:ea typeface="Amiri" pitchFamily="2" charset="-78"/>
                 <a:cs typeface="Amiri" pitchFamily="2" charset="-78"/>
               </a:rPr>
               <a:t>حَقّ</a:t>
@@ -24915,6 +25039,7 @@
                   <a:srgbClr val="1B3B6F"/>
                 </a:solidFill>
                 <a:latin typeface="Amiri" pitchFamily="2" charset="-78"/>
+                <a:ea typeface="Amiri" pitchFamily="2" charset="-78"/>
                 <a:cs typeface="Amiri" pitchFamily="2" charset="-78"/>
               </a:rPr>
               <a:t>كِتَابًا</a:t>
@@ -24987,6 +25112,7 @@
                   <a:srgbClr val="1B3B6F"/>
                 </a:solidFill>
                 <a:latin typeface="Amiri" pitchFamily="2" charset="-78"/>
+                <a:ea typeface="Amiri" pitchFamily="2" charset="-78"/>
                 <a:cs typeface="Amiri" pitchFamily="2" charset="-78"/>
               </a:rPr>
               <a:t>قُرْآن</a:t>
@@ -25059,6 +25185,7 @@
                   <a:srgbClr val="1B3B6F"/>
                 </a:solidFill>
                 <a:latin typeface="Amiri" pitchFamily="2" charset="-78"/>
+                <a:ea typeface="Amiri" pitchFamily="2" charset="-78"/>
                 <a:cs typeface="Amiri" pitchFamily="2" charset="-78"/>
               </a:rPr>
               <a:t>بِئْر</a:t>
@@ -25560,6 +25687,7 @@
                   <a:srgbClr val="D4AF37"/>
                 </a:solidFill>
                 <a:latin typeface="Amiri" pitchFamily="2" charset="-78"/>
+                <a:ea typeface="Amiri" pitchFamily="2" charset="-78"/>
                 <a:cs typeface="Amiri" pitchFamily="2" charset="-78"/>
               </a:rPr>
               <a:t>م</a:t>
@@ -25880,6 +26008,7 @@
                   <a:srgbClr val="8A6D1E"/>
                 </a:solidFill>
                 <a:latin typeface="Amiri" pitchFamily="2" charset="-78"/>
+                <a:ea typeface="Amiri" pitchFamily="2" charset="-78"/>
                 <a:cs typeface="Amiri" pitchFamily="2" charset="-78"/>
               </a:rPr>
               <a:t>آدَابُ الصَّفِّ</a:t>
@@ -27411,6 +27540,7 @@
                   <a:srgbClr val="D4AF37"/>
                 </a:solidFill>
                 <a:latin typeface="Amiri" pitchFamily="2" charset="-78"/>
+                <a:ea typeface="Amiri" pitchFamily="2" charset="-78"/>
                 <a:cs typeface="Amiri" pitchFamily="2" charset="-78"/>
               </a:rPr>
               <a:t>م</a:t>
@@ -27731,6 +27861,7 @@
                   <a:srgbClr val="8A6D1E"/>
                 </a:solidFill>
                 <a:latin typeface="Amiri" pitchFamily="2" charset="-78"/>
+                <a:ea typeface="Amiri" pitchFamily="2" charset="-78"/>
                 <a:cs typeface="Amiri" pitchFamily="2" charset="-78"/>
               </a:rPr>
               <a:t>الإِجَابَاتُ</a:t>
@@ -27926,6 +28057,7 @@
                   <a:srgbClr val="1B3B6F"/>
                 </a:solidFill>
                 <a:latin typeface="Amiri" pitchFamily="2" charset="-78"/>
+                <a:ea typeface="Amiri" pitchFamily="2" charset="-78"/>
                 <a:cs typeface="Amiri" pitchFamily="2" charset="-78"/>
               </a:rPr>
               <a:t>مَرَّ</a:t>
@@ -27991,6 +28123,7 @@
                   <a:srgbClr val="1B3B6F"/>
                 </a:solidFill>
                 <a:latin typeface="Amiri" pitchFamily="2" charset="-78"/>
+                <a:ea typeface="Amiri" pitchFamily="2" charset="-78"/>
                 <a:cs typeface="Amiri" pitchFamily="2" charset="-78"/>
               </a:rPr>
               <a:t>حَقّ</a:t>
@@ -28148,6 +28281,7 @@
                   <a:srgbClr val="1B3B6F"/>
                 </a:solidFill>
                 <a:latin typeface="Amiri" pitchFamily="2" charset="-78"/>
+                <a:ea typeface="Amiri" pitchFamily="2" charset="-78"/>
                 <a:cs typeface="Amiri" pitchFamily="2" charset="-78"/>
               </a:rPr>
               <a:t>قَلَمٌ</a:t>
@@ -28213,6 +28347,7 @@
                   <a:srgbClr val="1B3B6F"/>
                 </a:solidFill>
                 <a:latin typeface="Amiri" pitchFamily="2" charset="-78"/>
+                <a:ea typeface="Amiri" pitchFamily="2" charset="-78"/>
                 <a:cs typeface="Amiri" pitchFamily="2" charset="-78"/>
               </a:rPr>
               <a:t>كِتَابًا</a:t>
@@ -28370,6 +28505,7 @@
                   <a:srgbClr val="1B3B6F"/>
                 </a:solidFill>
                 <a:latin typeface="Amiri" pitchFamily="2" charset="-78"/>
+                <a:ea typeface="Amiri" pitchFamily="2" charset="-78"/>
                 <a:cs typeface="Amiri" pitchFamily="2" charset="-78"/>
               </a:rPr>
               <a:t>آمَنَ</a:t>
@@ -28435,6 +28571,7 @@
                   <a:srgbClr val="1B3B6F"/>
                 </a:solidFill>
                 <a:latin typeface="Amiri" pitchFamily="2" charset="-78"/>
+                <a:ea typeface="Amiri" pitchFamily="2" charset="-78"/>
                 <a:cs typeface="Amiri" pitchFamily="2" charset="-78"/>
               </a:rPr>
               <a:t>قُرْآن</a:t>
@@ -28592,6 +28729,7 @@
                   <a:srgbClr val="1B3B6F"/>
                 </a:solidFill>
                 <a:latin typeface="Amiri" pitchFamily="2" charset="-78"/>
+                <a:ea typeface="Amiri" pitchFamily="2" charset="-78"/>
                 <a:cs typeface="Amiri" pitchFamily="2" charset="-78"/>
               </a:rPr>
               <a:t>إِمَامٌ</a:t>
@@ -28657,6 +28795,7 @@
                   <a:srgbClr val="1B3B6F"/>
                 </a:solidFill>
                 <a:latin typeface="Amiri" pitchFamily="2" charset="-78"/>
+                <a:ea typeface="Amiri" pitchFamily="2" charset="-78"/>
                 <a:cs typeface="Amiri" pitchFamily="2" charset="-78"/>
               </a:rPr>
               <a:t>بِئْر</a:t>
@@ -28790,6 +28929,7 @@
                   <a:srgbClr val="D4AF37"/>
                 </a:solidFill>
                 <a:latin typeface="Amiri" pitchFamily="2" charset="-78"/>
+                <a:ea typeface="Amiri" pitchFamily="2" charset="-78"/>
                 <a:cs typeface="Amiri" pitchFamily="2" charset="-78"/>
               </a:rPr>
               <a:t>م</a:t>
@@ -29110,6 +29250,7 @@
                   <a:srgbClr val="8A6D1E"/>
                 </a:solidFill>
                 <a:latin typeface="Amiri" pitchFamily="2" charset="-78"/>
+                <a:ea typeface="Amiri" pitchFamily="2" charset="-78"/>
                 <a:cs typeface="Amiri" pitchFamily="2" charset="-78"/>
               </a:rPr>
               <a:t>اُكْتُبْ</a:t>
@@ -29285,6 +29426,7 @@
                   <a:srgbClr val="2E8B57"/>
                 </a:solidFill>
                 <a:latin typeface="Amiri" pitchFamily="2" charset="-78"/>
+                <a:ea typeface="Amiri" pitchFamily="2" charset="-78"/>
                 <a:cs typeface="Amiri" pitchFamily="2" charset="-78"/>
               </a:rPr>
               <a:t>الأَسَاسُ</a:t>
@@ -29579,6 +29721,7 @@
                   <a:srgbClr val="C9780A"/>
                 </a:solidFill>
                 <a:latin typeface="Amiri" pitchFamily="2" charset="-78"/>
+                <a:ea typeface="Amiri" pitchFamily="2" charset="-78"/>
                 <a:cs typeface="Amiri" pitchFamily="2" charset="-78"/>
               </a:rPr>
               <a:t>التَّطْوِيرُ</a:t>
@@ -29873,6 +30016,7 @@
                   <a:srgbClr val="B83227"/>
                 </a:solidFill>
                 <a:latin typeface="Amiri" pitchFamily="2" charset="-78"/>
+                <a:ea typeface="Amiri" pitchFamily="2" charset="-78"/>
                 <a:cs typeface="Amiri" pitchFamily="2" charset="-78"/>
               </a:rPr>
               <a:t>التَّحَدِّي</a:t>
@@ -30163,6 +30307,7 @@
                   <a:srgbClr val="D4AF37"/>
                 </a:solidFill>
                 <a:latin typeface="Amiri" pitchFamily="2" charset="-78"/>
+                <a:ea typeface="Amiri" pitchFamily="2" charset="-78"/>
                 <a:cs typeface="Amiri" pitchFamily="2" charset="-78"/>
               </a:rPr>
               <a:t>م</a:t>
@@ -30483,6 +30628,7 @@
                   <a:srgbClr val="8A6D1E"/>
                 </a:solidFill>
                 <a:latin typeface="Amiri" pitchFamily="2" charset="-78"/>
+                <a:ea typeface="Amiri" pitchFamily="2" charset="-78"/>
                 <a:cs typeface="Amiri" pitchFamily="2" charset="-78"/>
               </a:rPr>
               <a:t>التَّحَدُّثُ</a:t>
@@ -31253,6 +31399,7 @@
                   <a:srgbClr val="1B3B6F"/>
                 </a:solidFill>
                 <a:latin typeface="Amiri" pitchFamily="2" charset="-78"/>
+                <a:ea typeface="Amiri" pitchFamily="2" charset="-78"/>
                 <a:cs typeface="Amiri" pitchFamily="2" charset="-78"/>
               </a:rPr>
               <a:t>اِقْرَأْ: مُحَمَّدٌ</a:t>
@@ -31390,6 +31537,7 @@
                   <a:srgbClr val="1B3B6F"/>
                 </a:solidFill>
                 <a:latin typeface="Amiri" pitchFamily="2" charset="-78"/>
+                <a:ea typeface="Amiri" pitchFamily="2" charset="-78"/>
                 <a:cs typeface="Amiri" pitchFamily="2" charset="-78"/>
               </a:rPr>
               <a:t>اِقْرَأْ: كِتَابٌ · كِتَابٍ · كِتَابًا</a:t>
@@ -31527,6 +31675,7 @@
                   <a:srgbClr val="1B3B6F"/>
                 </a:solidFill>
                 <a:latin typeface="Amiri" pitchFamily="2" charset="-78"/>
+                <a:ea typeface="Amiri" pitchFamily="2" charset="-78"/>
                 <a:cs typeface="Amiri" pitchFamily="2" charset="-78"/>
               </a:rPr>
               <a:t>دَرَسَ أَمْ دَرَّسَ؟</a:t>
@@ -31664,6 +31813,7 @@
                   <a:srgbClr val="1B3B6F"/>
                 </a:solidFill>
                 <a:latin typeface="Amiri" pitchFamily="2" charset="-78"/>
+                <a:ea typeface="Amiri" pitchFamily="2" charset="-78"/>
                 <a:cs typeface="Amiri" pitchFamily="2" charset="-78"/>
               </a:rPr>
               <a:t>أَيْنَ الهَمْزَةُ؟</a:t>
@@ -31839,6 +31989,7 @@
                   <a:srgbClr val="1D5FBF"/>
                 </a:solidFill>
                 <a:latin typeface="Amiri" pitchFamily="2" charset="-78"/>
+                <a:ea typeface="Amiri" pitchFamily="2" charset="-78"/>
                 <a:cs typeface="Amiri" pitchFamily="2" charset="-78"/>
               </a:rPr>
               <a:t>فِيهَا شَدَّةٌ / تَنْوِينٌ .</a:t>
@@ -31942,6 +32093,7 @@
                   <a:srgbClr val="1F2A37"/>
                 </a:solidFill>
                 <a:latin typeface="Amiri" pitchFamily="2" charset="-78"/>
+                <a:ea typeface="Amiri" pitchFamily="2" charset="-78"/>
                 <a:cs typeface="Amiri" pitchFamily="2" charset="-78"/>
               </a:rPr>
               <a:t>فِيهَا مَدٌّ / هَمْزَةٌ .</a:t>
@@ -32045,6 +32197,7 @@
                   <a:srgbClr val="1F2A37"/>
                 </a:solidFill>
                 <a:latin typeface="Amiri" pitchFamily="2" charset="-78"/>
+                <a:ea typeface="Amiri" pitchFamily="2" charset="-78"/>
                 <a:cs typeface="Amiri" pitchFamily="2" charset="-78"/>
               </a:rPr>
               <a:t>الهَمْزَةُ عَلَى ___ .</a:t>
@@ -32148,6 +32301,7 @@
                   <a:srgbClr val="1F2A37"/>
                 </a:solidFill>
                 <a:latin typeface="Amiri" pitchFamily="2" charset="-78"/>
+                <a:ea typeface="Amiri" pitchFamily="2" charset="-78"/>
                 <a:cs typeface="Amiri" pitchFamily="2" charset="-78"/>
               </a:rPr>
               <a:t>قَرَأَ / قَرَأَتْ ___ .</a:t>
@@ -32321,6 +32475,7 @@
                   <a:srgbClr val="1F2A37"/>
                 </a:solidFill>
                 <a:latin typeface="Amiri" pitchFamily="2" charset="-78"/>
+                <a:ea typeface="Amiri" pitchFamily="2" charset="-78"/>
                 <a:cs typeface="Amiri" pitchFamily="2" charset="-78"/>
               </a:rPr>
               <a:t>اِقْرَأْ: دَرَّسَ</a:t>
@@ -32460,6 +32615,7 @@
                   <a:srgbClr val="1F2A37"/>
                 </a:solidFill>
                 <a:latin typeface="Amiri" pitchFamily="2" charset="-78"/>
+                <a:ea typeface="Amiri" pitchFamily="2" charset="-78"/>
                 <a:cs typeface="Amiri" pitchFamily="2" charset="-78"/>
               </a:rPr>
               <a:t>دَرَّسَ. فِيهَا شَدَّةٌ.</a:t>
@@ -32631,6 +32787,7 @@
                   <a:srgbClr val="D4AF37"/>
                 </a:solidFill>
                 <a:latin typeface="Amiri" pitchFamily="2" charset="-78"/>
+                <a:ea typeface="Amiri" pitchFamily="2" charset="-78"/>
                 <a:cs typeface="Amiri" pitchFamily="2" charset="-78"/>
               </a:rPr>
               <a:t>م</a:t>
@@ -32951,6 +33108,7 @@
                   <a:srgbClr val="8A6D1E"/>
                 </a:solidFill>
                 <a:latin typeface="Amiri" pitchFamily="2" charset="-78"/>
+                <a:ea typeface="Amiri" pitchFamily="2" charset="-78"/>
                 <a:cs typeface="Amiri" pitchFamily="2" charset="-78"/>
               </a:rPr>
               <a:t>أَخْطَاءٌ شَائِعَةٌ</a:t>
@@ -33504,6 +33662,7 @@
                   <a:srgbClr val="5A6472"/>
                 </a:solidFill>
                 <a:latin typeface="Amiri" pitchFamily="2" charset="-78"/>
+                <a:ea typeface="Amiri" pitchFamily="2" charset="-78"/>
                 <a:cs typeface="Amiri" pitchFamily="2" charset="-78"/>
               </a:rPr>
               <a:t>آ</a:t>
@@ -33568,6 +33727,7 @@
                   <a:srgbClr val="5A6472"/>
                 </a:solidFill>
                 <a:latin typeface="Amiri" pitchFamily="2" charset="-78"/>
+                <a:ea typeface="Amiri" pitchFamily="2" charset="-78"/>
                 <a:cs typeface="Amiri" pitchFamily="2" charset="-78"/>
               </a:rPr>
               <a:t>آدَم</a:t>
@@ -33594,6 +33754,7 @@
                   <a:srgbClr val="5A6472"/>
                 </a:solidFill>
                 <a:latin typeface="Amiri" pitchFamily="2" charset="-78"/>
+                <a:ea typeface="Amiri" pitchFamily="2" charset="-78"/>
                 <a:cs typeface="Amiri" pitchFamily="2" charset="-78"/>
               </a:rPr>
               <a:t>بَاب</a:t>
@@ -33853,6 +34014,7 @@
                   <a:srgbClr val="5A6472"/>
                 </a:solidFill>
                 <a:latin typeface="Amiri" pitchFamily="2" charset="-78"/>
+                <a:ea typeface="Amiri" pitchFamily="2" charset="-78"/>
                 <a:cs typeface="Amiri" pitchFamily="2" charset="-78"/>
               </a:rPr>
               <a:t>الـ</a:t>
@@ -33891,6 +34053,7 @@
                   <a:srgbClr val="5A6472"/>
                 </a:solidFill>
                 <a:latin typeface="Amiri" pitchFamily="2" charset="-78"/>
+                <a:ea typeface="Amiri" pitchFamily="2" charset="-78"/>
                 <a:cs typeface="Amiri" pitchFamily="2" charset="-78"/>
               </a:rPr>
               <a:t>الكِتَابُ</a:t>
@@ -34140,6 +34303,7 @@
                   <a:srgbClr val="D4AF37"/>
                 </a:solidFill>
                 <a:latin typeface="Amiri" pitchFamily="2" charset="-78"/>
+                <a:ea typeface="Amiri" pitchFamily="2" charset="-78"/>
                 <a:cs typeface="Amiri" pitchFamily="2" charset="-78"/>
               </a:rPr>
               <a:t>م</a:t>
@@ -34460,6 +34624,7 @@
                   <a:srgbClr val="8A6D1E"/>
                 </a:solidFill>
                 <a:latin typeface="Amiri" pitchFamily="2" charset="-78"/>
+                <a:ea typeface="Amiri" pitchFamily="2" charset="-78"/>
                 <a:cs typeface="Amiri" pitchFamily="2" charset="-78"/>
               </a:rPr>
               <a:t>قَيِّمْ عَمَلَكَ</a:t>
@@ -34932,6 +35097,7 @@
                   <a:srgbClr val="1F2A37"/>
                 </a:solidFill>
                 <a:latin typeface="Amiri" pitchFamily="2" charset="-78"/>
+                <a:ea typeface="Amiri" pitchFamily="2" charset="-78"/>
                 <a:cs typeface="Amiri" pitchFamily="2" charset="-78"/>
               </a:rPr>
               <a:t>أَ، آ، بَا</a:t>
@@ -35282,6 +35448,7 @@
                   <a:srgbClr val="1F2A37"/>
                 </a:solidFill>
                 <a:latin typeface="Amiri" pitchFamily="2" charset="-78"/>
+                <a:ea typeface="Amiri" pitchFamily="2" charset="-78"/>
                 <a:cs typeface="Amiri" pitchFamily="2" charset="-78"/>
               </a:rPr>
               <a:t>الـ</a:t>
@@ -35669,6 +35836,7 @@
                   <a:srgbClr val="D4AF37"/>
                 </a:solidFill>
                 <a:latin typeface="Amiri" pitchFamily="2" charset="-78"/>
+                <a:ea typeface="Amiri" pitchFamily="2" charset="-78"/>
                 <a:cs typeface="Amiri" pitchFamily="2" charset="-78"/>
               </a:rPr>
               <a:t>م</a:t>
@@ -35989,6 +36157,7 @@
                   <a:srgbClr val="8A6D1E"/>
                 </a:solidFill>
                 <a:latin typeface="Amiri" pitchFamily="2" charset="-78"/>
+                <a:ea typeface="Amiri" pitchFamily="2" charset="-78"/>
                 <a:cs typeface="Amiri" pitchFamily="2" charset="-78"/>
               </a:rPr>
               <a:t>تَذْكِرَةُ الخُرُوجِ</a:t>
@@ -36175,6 +36344,7 @@
                   <a:srgbClr val="1B3B6F"/>
                 </a:solidFill>
                 <a:latin typeface="Amiri" pitchFamily="2" charset="-78"/>
+                <a:ea typeface="Amiri" pitchFamily="2" charset="-78"/>
                 <a:cs typeface="Amiri" pitchFamily="2" charset="-78"/>
               </a:rPr>
               <a:t>بَاب</a:t>
@@ -36201,6 +36371,7 @@
                   <a:srgbClr val="1B3B6F"/>
                 </a:solidFill>
                 <a:latin typeface="Amiri" pitchFamily="2" charset="-78"/>
+                <a:ea typeface="Amiri" pitchFamily="2" charset="-78"/>
                 <a:cs typeface="Amiri" pitchFamily="2" charset="-78"/>
               </a:rPr>
               <a:t>آ</a:t>
@@ -37434,6 +37605,7 @@
                   <a:srgbClr val="D4AF37"/>
                 </a:solidFill>
                 <a:latin typeface="Amiri" pitchFamily="2" charset="-78"/>
+                <a:ea typeface="Amiri" pitchFamily="2" charset="-78"/>
                 <a:cs typeface="Amiri" pitchFamily="2" charset="-78"/>
               </a:rPr>
               <a:t>م</a:t>
@@ -37754,6 +37926,7 @@
                   <a:srgbClr val="8A6D1E"/>
                 </a:solidFill>
                 <a:latin typeface="Amiri" pitchFamily="2" charset="-78"/>
+                <a:ea typeface="Amiri" pitchFamily="2" charset="-78"/>
                 <a:cs typeface="Amiri" pitchFamily="2" charset="-78"/>
               </a:rPr>
               <a:t>إِجَابَاتُ تَذْكِرَةِ الخُرُوجِ</a:t>
@@ -37940,6 +38113,7 @@
                   <a:srgbClr val="1B3B6F"/>
                 </a:solidFill>
                 <a:latin typeface="Amiri" pitchFamily="2" charset="-78"/>
+                <a:ea typeface="Amiri" pitchFamily="2" charset="-78"/>
                 <a:cs typeface="Amiri" pitchFamily="2" charset="-78"/>
               </a:rPr>
               <a:t>بَاب</a:t>
@@ -37966,6 +38140,7 @@
                   <a:srgbClr val="1B3B6F"/>
                 </a:solidFill>
                 <a:latin typeface="Amiri" pitchFamily="2" charset="-78"/>
+                <a:ea typeface="Amiri" pitchFamily="2" charset="-78"/>
                 <a:cs typeface="Amiri" pitchFamily="2" charset="-78"/>
               </a:rPr>
               <a:t>آ</a:t>
@@ -39394,6 +39569,7 @@
                   <a:srgbClr val="D4AF37"/>
                 </a:solidFill>
                 <a:latin typeface="Amiri" pitchFamily="2" charset="-78"/>
+                <a:ea typeface="Amiri" pitchFamily="2" charset="-78"/>
                 <a:cs typeface="Amiri" pitchFamily="2" charset="-78"/>
               </a:rPr>
               <a:t>م</a:t>
@@ -39714,6 +39890,7 @@
                   <a:srgbClr val="8A6D1E"/>
                 </a:solidFill>
                 <a:latin typeface="Amiri" pitchFamily="2" charset="-78"/>
+                <a:ea typeface="Amiri" pitchFamily="2" charset="-78"/>
                 <a:cs typeface="Amiri" pitchFamily="2" charset="-78"/>
               </a:rPr>
               <a:t>التَّحْضِيرُ لِلدَّرْسِ القَادِمِ</a:t>
@@ -39927,6 +40104,7 @@
                   <a:srgbClr val="1B3B6F"/>
                 </a:solidFill>
                 <a:latin typeface="Amiri" pitchFamily="2" charset="-78"/>
+                <a:ea typeface="Amiri" pitchFamily="2" charset="-78"/>
                 <a:cs typeface="Amiri" pitchFamily="2" charset="-78"/>
               </a:rPr>
               <a:t>٠ ١ ٢ ٣</a:t>
@@ -40006,6 +40184,7 @@
                   <a:srgbClr val="1B3B6F"/>
                 </a:solidFill>
                 <a:latin typeface="Amiri" pitchFamily="2" charset="-78"/>
+                <a:ea typeface="Amiri" pitchFamily="2" charset="-78"/>
                 <a:cs typeface="Amiri" pitchFamily="2" charset="-78"/>
               </a:rPr>
               <a:t>وَاحِدٌ</a:t>
@@ -40052,11 +40231,12 @@
               <a:buNone/>
             </a:pPr>
             <a:r>
-              <a:rPr lang="en-US" sz="1000" i="1" dirty="0">
+              <a:rPr lang="ar-SA" sz="1000" i="1" dirty="0">
                 <a:solidFill>
                   <a:srgbClr val="5A6472"/>
                 </a:solidFill>
                 <a:latin typeface="Calibri" pitchFamily="34" charset="0"/>
+                <a:ea typeface="Amiri" pitchFamily="2" charset="-78"/>
                 <a:cs typeface="Amiri" pitchFamily="2" charset="-78"/>
               </a:rPr>
               <a:t>  f. وَاحِدَةٌ</a:t>
@@ -40095,6 +40275,7 @@
                   <a:srgbClr val="1B3B6F"/>
                 </a:solidFill>
                 <a:latin typeface="Amiri" pitchFamily="2" charset="-78"/>
+                <a:ea typeface="Amiri" pitchFamily="2" charset="-78"/>
                 <a:cs typeface="Amiri" pitchFamily="2" charset="-78"/>
               </a:rPr>
               <a:t>اِثْنَانِ</a:t>
@@ -40141,11 +40322,12 @@
               <a:buNone/>
             </a:pPr>
             <a:r>
-              <a:rPr lang="en-US" sz="1000" i="1" dirty="0">
+              <a:rPr lang="ar-SA" sz="1000" i="1" dirty="0">
                 <a:solidFill>
                   <a:srgbClr val="5A6472"/>
                 </a:solidFill>
                 <a:latin typeface="Calibri" pitchFamily="34" charset="0"/>
+                <a:ea typeface="Amiri" pitchFamily="2" charset="-78"/>
                 <a:cs typeface="Amiri" pitchFamily="2" charset="-78"/>
               </a:rPr>
               <a:t>  f. اِثْنَتَانِ</a:t>
@@ -40184,6 +40366,7 @@
                   <a:srgbClr val="1B3B6F"/>
                 </a:solidFill>
                 <a:latin typeface="Amiri" pitchFamily="2" charset="-78"/>
+                <a:ea typeface="Amiri" pitchFamily="2" charset="-78"/>
                 <a:cs typeface="Amiri" pitchFamily="2" charset="-78"/>
               </a:rPr>
               <a:t>ثَلَاثَةٌ</a:t>
@@ -40263,6 +40446,7 @@
                   <a:srgbClr val="1B3B6F"/>
                 </a:solidFill>
                 <a:latin typeface="Amiri" pitchFamily="2" charset="-78"/>
+                <a:ea typeface="Amiri" pitchFamily="2" charset="-78"/>
                 <a:cs typeface="Amiri" pitchFamily="2" charset="-78"/>
               </a:rPr>
               <a:t>عَشَرَةٌ</a:t>
@@ -40296,11 +40480,12 @@
               <a:buNone/>
             </a:pPr>
             <a:r>
-              <a:rPr lang="en-US" sz="1200" b="1" dirty="0">
+              <a:rPr lang="ar-SA" sz="1200" b="1" dirty="0">
                 <a:solidFill>
                   <a:srgbClr val="1F2A37"/>
                 </a:solidFill>
                 <a:latin typeface="Calibri" pitchFamily="34" charset="0"/>
+                <a:ea typeface="Amiri" pitchFamily="2" charset="-78"/>
                 <a:cs typeface="Amiri" pitchFamily="2" charset="-78"/>
               </a:rPr>
               <a:t>ten  ١٠</a:t>
@@ -40393,6 +40578,7 @@
                   <a:srgbClr val="1F2A37"/>
                 </a:solidFill>
                 <a:latin typeface="Amiri" pitchFamily="2" charset="-78"/>
+                <a:ea typeface="Amiri" pitchFamily="2" charset="-78"/>
                 <a:cs typeface="Amiri" pitchFamily="2" charset="-78"/>
               </a:rPr>
               <a:t>٠</a:t>
@@ -40419,6 +40605,7 @@
                   <a:srgbClr val="1F2A37"/>
                 </a:solidFill>
                 <a:latin typeface="Amiri" pitchFamily="2" charset="-78"/>
+                <a:ea typeface="Amiri" pitchFamily="2" charset="-78"/>
                 <a:cs typeface="Amiri" pitchFamily="2" charset="-78"/>
               </a:rPr>
               <a:t>٩</a:t>
@@ -40470,6 +40657,7 @@
                   <a:srgbClr val="1B3B6F"/>
                 </a:solidFill>
                 <a:latin typeface="Amiri" pitchFamily="2" charset="-78"/>
+                <a:ea typeface="Amiri" pitchFamily="2" charset="-78"/>
                 <a:cs typeface="Amiri" pitchFamily="2" charset="-78"/>
               </a:rPr>
               <a:t>٠ ١ ٢ ٣ ٤ ٥ ٦ ٧ ٨ ٩</a:t>
@@ -40795,6 +40983,7 @@
                   <a:srgbClr val="1F2A37"/>
                 </a:solidFill>
                 <a:latin typeface="Amiri" pitchFamily="2" charset="-78"/>
+                <a:ea typeface="Amiri" pitchFamily="2" charset="-78"/>
                 <a:cs typeface="Amiri" pitchFamily="2" charset="-78"/>
               </a:rPr>
               <a:t>أَ آ بَا</a:t>
@@ -41165,6 +41354,7 @@
                   <a:srgbClr val="FFFFFF"/>
                 </a:solidFill>
                 <a:latin typeface="Amiri" pitchFamily="2" charset="-78"/>
+                <a:ea typeface="Amiri" pitchFamily="2" charset="-78"/>
                 <a:cs typeface="Amiri" pitchFamily="2" charset="-78"/>
               </a:rPr>
               <a:t>أَحْسَنْتُمْ! إِلَى اللِّقَاءِ</a:t>
@@ -41317,6 +41507,7 @@
                   <a:srgbClr val="D4AF37"/>
                 </a:solidFill>
                 <a:latin typeface="Amiri" pitchFamily="2" charset="-78"/>
+                <a:ea typeface="Amiri" pitchFamily="2" charset="-78"/>
                 <a:cs typeface="Amiri" pitchFamily="2" charset="-78"/>
               </a:rPr>
               <a:t>الأَرْقَامُ الهِنْدِيَّةُ مِنْ ٠ إِلَى ١٠٠</a:t>
@@ -41368,6 +41559,7 @@
                   <a:srgbClr val="FFFFFF"/>
                 </a:solidFill>
                 <a:latin typeface="Amiri" pitchFamily="2" charset="-78"/>
+                <a:ea typeface="Amiri" pitchFamily="2" charset="-78"/>
                 <a:cs typeface="Amiri" pitchFamily="2" charset="-78"/>
               </a:rPr>
               <a:t>٠</a:t>
@@ -41394,6 +41586,7 @@
                   <a:srgbClr val="FFFFFF"/>
                 </a:solidFill>
                 <a:latin typeface="Amiri" pitchFamily="2" charset="-78"/>
+                <a:ea typeface="Amiri" pitchFamily="2" charset="-78"/>
                 <a:cs typeface="Amiri" pitchFamily="2" charset="-78"/>
               </a:rPr>
               <a:t>٩</a:t>
@@ -41502,6 +41695,7 @@
                   <a:srgbClr val="D4AF37"/>
                 </a:solidFill>
                 <a:latin typeface="Amiri" pitchFamily="2" charset="-78"/>
+                <a:ea typeface="Amiri" pitchFamily="2" charset="-78"/>
                 <a:cs typeface="Amiri" pitchFamily="2" charset="-78"/>
               </a:rPr>
               <a:t>م</a:t>
@@ -41822,6 +42016,7 @@
                   <a:srgbClr val="8A6D1E"/>
                 </a:solidFill>
                 <a:latin typeface="Amiri" pitchFamily="2" charset="-78"/>
+                <a:ea typeface="Amiri" pitchFamily="2" charset="-78"/>
                 <a:cs typeface="Amiri" pitchFamily="2" charset="-78"/>
               </a:rPr>
               <a:t>خَرِيطَةُ الدَّرْسِ</a:t>
@@ -42136,6 +42331,7 @@
                   <a:srgbClr val="0E7C86"/>
                 </a:solidFill>
                 <a:latin typeface="Amiri" pitchFamily="2" charset="-78"/>
+                <a:ea typeface="Amiri" pitchFamily="2" charset="-78"/>
                 <a:cs typeface="Amiri" pitchFamily="2" charset="-78"/>
               </a:rPr>
               <a:t>اِبْدَأِ الآنَ</a:t>
@@ -42412,6 +42608,7 @@
                   <a:srgbClr val="1B3B6F"/>
                 </a:solidFill>
                 <a:latin typeface="Amiri" pitchFamily="2" charset="-78"/>
+                <a:ea typeface="Amiri" pitchFamily="2" charset="-78"/>
                 <a:cs typeface="Amiri" pitchFamily="2" charset="-78"/>
               </a:rPr>
               <a:t>كَلِمَاتٌ وَقَوَاعِدُ</a:t>
@@ -42688,6 +42885,7 @@
                   <a:srgbClr val="6B4C9A"/>
                 </a:solidFill>
                 <a:latin typeface="Amiri" pitchFamily="2" charset="-78"/>
+                <a:ea typeface="Amiri" pitchFamily="2" charset="-78"/>
                 <a:cs typeface="Amiri" pitchFamily="2" charset="-78"/>
               </a:rPr>
               <a:t>شَاهِدْ</a:t>
@@ -42964,6 +43162,7 @@
                   <a:srgbClr val="2F6FB0"/>
                 </a:solidFill>
                 <a:latin typeface="Amiri" pitchFamily="2" charset="-78"/>
+                <a:ea typeface="Amiri" pitchFamily="2" charset="-78"/>
                 <a:cs typeface="Amiri" pitchFamily="2" charset="-78"/>
               </a:rPr>
               <a:t>مَعًا</a:t>
@@ -43240,6 +43439,7 @@
                   <a:srgbClr val="1E6B52"/>
                 </a:solidFill>
                 <a:latin typeface="Amiri" pitchFamily="2" charset="-78"/>
+                <a:ea typeface="Amiri" pitchFamily="2" charset="-78"/>
                 <a:cs typeface="Amiri" pitchFamily="2" charset="-78"/>
               </a:rPr>
               <a:t>وَحْدَكَ</a:t>
@@ -43516,6 +43716,7 @@
                   <a:srgbClr val="8A6D1E"/>
                 </a:solidFill>
                 <a:latin typeface="Amiri" pitchFamily="2" charset="-78"/>
+                <a:ea typeface="Amiri" pitchFamily="2" charset="-78"/>
                 <a:cs typeface="Amiri" pitchFamily="2" charset="-78"/>
               </a:rPr>
               <a:t>قَيِّمْ عَمَلَكَ</a:t>
@@ -43792,6 +43993,7 @@
                   <a:srgbClr val="C45A3C"/>
                 </a:solidFill>
                 <a:latin typeface="Amiri" pitchFamily="2" charset="-78"/>
+                <a:ea typeface="Amiri" pitchFamily="2" charset="-78"/>
                 <a:cs typeface="Amiri" pitchFamily="2" charset="-78"/>
               </a:rPr>
               <a:t>اِسْتَعِدَّ</a:t>
@@ -44035,6 +44237,7 @@
                   <a:srgbClr val="D4AF37"/>
                 </a:solidFill>
                 <a:latin typeface="Amiri" pitchFamily="2" charset="-78"/>
+                <a:ea typeface="Amiri" pitchFamily="2" charset="-78"/>
                 <a:cs typeface="Amiri" pitchFamily="2" charset="-78"/>
               </a:rPr>
               <a:t>م</a:t>
@@ -44355,6 +44558,7 @@
                   <a:srgbClr val="8A6D1E"/>
                 </a:solidFill>
                 <a:latin typeface="Amiri" pitchFamily="2" charset="-78"/>
+                <a:ea typeface="Amiri" pitchFamily="2" charset="-78"/>
                 <a:cs typeface="Amiri" pitchFamily="2" charset="-78"/>
               </a:rPr>
               <a:t>اِبْدَأِ الآنَ</a:t>
@@ -44541,6 +44745,7 @@
                   <a:srgbClr val="1B3B6F"/>
                 </a:solidFill>
                 <a:latin typeface="Amiri" pitchFamily="2" charset="-78"/>
+                <a:ea typeface="Amiri" pitchFamily="2" charset="-78"/>
                 <a:cs typeface="Amiri" pitchFamily="2" charset="-78"/>
               </a:rPr>
               <a:t>ـبـ</a:t>
@@ -45329,6 +45534,7 @@
                   <a:srgbClr val="1B3B6F"/>
                 </a:solidFill>
                 <a:latin typeface="Amiri" pitchFamily="2" charset="-78"/>
+                <a:ea typeface="Amiri" pitchFamily="2" charset="-78"/>
                 <a:cs typeface="Amiri" pitchFamily="2" charset="-78"/>
               </a:rPr>
               <a:t>بَ</a:t>
@@ -45793,6 +45999,7 @@
                   <a:srgbClr val="1B3B6F"/>
                 </a:solidFill>
                 <a:latin typeface="Amiri" pitchFamily="2" charset="-78"/>
+                <a:ea typeface="Amiri" pitchFamily="2" charset="-78"/>
                 <a:cs typeface="Amiri" pitchFamily="2" charset="-78"/>
               </a:rPr>
               <a:t>بْ</a:t>
@@ -46156,6 +46363,7 @@
                   <a:srgbClr val="1B3B6F"/>
                 </a:solidFill>
                 <a:latin typeface="Amiri" pitchFamily="2" charset="-78"/>
+                <a:ea typeface="Amiri" pitchFamily="2" charset="-78"/>
                 <a:cs typeface="Amiri" pitchFamily="2" charset="-78"/>
               </a:rPr>
               <a:t>مُحَمَّدٌ</a:t>
@@ -46807,6 +47015,7 @@
                   <a:srgbClr val="D4AF37"/>
                 </a:solidFill>
                 <a:latin typeface="Amiri" pitchFamily="2" charset="-78"/>
+                <a:ea typeface="Amiri" pitchFamily="2" charset="-78"/>
                 <a:cs typeface="Amiri" pitchFamily="2" charset="-78"/>
               </a:rPr>
               <a:t>م</a:t>
@@ -47127,6 +47336,7 @@
                   <a:srgbClr val="8A6D1E"/>
                 </a:solidFill>
                 <a:latin typeface="Amiri" pitchFamily="2" charset="-78"/>
+                <a:ea typeface="Amiri" pitchFamily="2" charset="-78"/>
                 <a:cs typeface="Amiri" pitchFamily="2" charset="-78"/>
               </a:rPr>
               <a:t>الإِجَابَاتُ وَالتَّعْلِيلُ</a:t>
@@ -47313,6 +47523,7 @@
                   <a:srgbClr val="1B3B6F"/>
                 </a:solidFill>
                 <a:latin typeface="Amiri" pitchFamily="2" charset="-78"/>
+                <a:ea typeface="Amiri" pitchFamily="2" charset="-78"/>
                 <a:cs typeface="Amiri" pitchFamily="2" charset="-78"/>
               </a:rPr>
               <a:t>ـبـ</a:t>
@@ -48231,6 +48442,7 @@
                   <a:srgbClr val="1B3B6F"/>
                 </a:solidFill>
                 <a:latin typeface="Amiri" pitchFamily="2" charset="-78"/>
+                <a:ea typeface="Amiri" pitchFamily="2" charset="-78"/>
                 <a:cs typeface="Amiri" pitchFamily="2" charset="-78"/>
               </a:rPr>
               <a:t>بَ</a:t>
@@ -48760,6 +48972,7 @@
                   <a:srgbClr val="1B3B6F"/>
                 </a:solidFill>
                 <a:latin typeface="Amiri" pitchFamily="2" charset="-78"/>
+                <a:ea typeface="Amiri" pitchFamily="2" charset="-78"/>
                 <a:cs typeface="Amiri" pitchFamily="2" charset="-78"/>
               </a:rPr>
               <a:t>بْ</a:t>
@@ -49188,6 +49401,7 @@
                   <a:srgbClr val="1B3B6F"/>
                 </a:solidFill>
                 <a:latin typeface="Amiri" pitchFamily="2" charset="-78"/>
+                <a:ea typeface="Amiri" pitchFamily="2" charset="-78"/>
                 <a:cs typeface="Amiri" pitchFamily="2" charset="-78"/>
               </a:rPr>
               <a:t>مُحَمَّدٌ</a:t>
@@ -49717,6 +49931,7 @@
                   <a:srgbClr val="1B3B6F"/>
                 </a:solidFill>
                 <a:latin typeface="Amiri" pitchFamily="2" charset="-78"/>
+                <a:ea typeface="Amiri" pitchFamily="2" charset="-78"/>
                 <a:cs typeface="Amiri" pitchFamily="2" charset="-78"/>
               </a:rPr>
               <a:t>ـّ   ـٌ   آ   ء</a:t>
@@ -49850,6 +50065,7 @@
                   <a:srgbClr val="D4AF37"/>
                 </a:solidFill>
                 <a:latin typeface="Amiri" pitchFamily="2" charset="-78"/>
+                <a:ea typeface="Amiri" pitchFamily="2" charset="-78"/>
                 <a:cs typeface="Amiri" pitchFamily="2" charset="-78"/>
               </a:rPr>
               <a:t>م</a:t>
@@ -50170,6 +50386,7 @@
                   <a:srgbClr val="8A6D1E"/>
                 </a:solidFill>
                 <a:latin typeface="Amiri" pitchFamily="2" charset="-78"/>
+                <a:ea typeface="Amiri" pitchFamily="2" charset="-78"/>
                 <a:cs typeface="Amiri" pitchFamily="2" charset="-78"/>
               </a:rPr>
               <a:t>الأَهْدَافُ وَمَعَايِيرُ النَّجَاحِ</a:t>
@@ -50318,6 +50535,7 @@
                   <a:srgbClr val="8A6D1E"/>
                 </a:solidFill>
                 <a:latin typeface="Amiri" pitchFamily="2" charset="-78"/>
+                <a:ea typeface="Amiri" pitchFamily="2" charset="-78"/>
                 <a:cs typeface="Amiri" pitchFamily="2" charset="-78"/>
               </a:rPr>
               <a:t>سَتَتَعَلَّمُ اليَوْمَ</a:t>
@@ -50634,6 +50852,7 @@
                   <a:srgbClr val="1F2A37"/>
                 </a:solidFill>
                 <a:latin typeface="Amiri" pitchFamily="2" charset="-78"/>
+                <a:ea typeface="Amiri" pitchFamily="2" charset="-78"/>
                 <a:cs typeface="Amiri" pitchFamily="2" charset="-78"/>
               </a:rPr>
               <a:t>آ</a:t>
@@ -50967,6 +51186,7 @@
                   <a:srgbClr val="2E8B57"/>
                 </a:solidFill>
                 <a:latin typeface="Amiri" pitchFamily="2" charset="-78"/>
+                <a:ea typeface="Amiri" pitchFamily="2" charset="-78"/>
                 <a:cs typeface="Amiri" pitchFamily="2" charset="-78"/>
               </a:rPr>
               <a:t>مُحَمَّد</a:t>
@@ -50993,6 +51213,7 @@
                   <a:srgbClr val="2E8B57"/>
                 </a:solidFill>
                 <a:latin typeface="Amiri" pitchFamily="2" charset="-78"/>
+                <a:ea typeface="Amiri" pitchFamily="2" charset="-78"/>
                 <a:cs typeface="Amiri" pitchFamily="2" charset="-78"/>
               </a:rPr>
               <a:t>كِتَابٌ</a:t>
@@ -51187,6 +51408,7 @@
                   <a:srgbClr val="C9780A"/>
                 </a:solidFill>
                 <a:latin typeface="Amiri" pitchFamily="2" charset="-78"/>
+                <a:ea typeface="Amiri" pitchFamily="2" charset="-78"/>
                 <a:cs typeface="Amiri" pitchFamily="2" charset="-78"/>
               </a:rPr>
               <a:t>دَرَسَ</a:t>
@@ -51213,6 +51435,7 @@
                   <a:srgbClr val="C9780A"/>
                 </a:solidFill>
                 <a:latin typeface="Amiri" pitchFamily="2" charset="-78"/>
+                <a:ea typeface="Amiri" pitchFamily="2" charset="-78"/>
                 <a:cs typeface="Amiri" pitchFamily="2" charset="-78"/>
               </a:rPr>
               <a:t>دَرَّسَ</a:t>
@@ -51445,6 +51668,7 @@
                   <a:srgbClr val="B83227"/>
                 </a:solidFill>
                 <a:latin typeface="Amiri" pitchFamily="2" charset="-78"/>
+                <a:ea typeface="Amiri" pitchFamily="2" charset="-78"/>
                 <a:cs typeface="Amiri" pitchFamily="2" charset="-78"/>
               </a:rPr>
               <a:t>الكِتَابُ</a:t>
@@ -51732,6 +51956,7 @@
                   <a:srgbClr val="D4AF37"/>
                 </a:solidFill>
                 <a:latin typeface="Amiri" pitchFamily="2" charset="-78"/>
+                <a:ea typeface="Amiri" pitchFamily="2" charset="-78"/>
                 <a:cs typeface="Amiri" pitchFamily="2" charset="-78"/>
               </a:rPr>
               <a:t>كَلِمَاتُ الدَّرْسِ</a:t>
@@ -52197,6 +52422,7 @@
                   <a:srgbClr val="1B3B6F"/>
                 </a:solidFill>
                 <a:latin typeface="Amiri" pitchFamily="2" charset="-78"/>
+                <a:ea typeface="Amiri" pitchFamily="2" charset="-78"/>
                 <a:cs typeface="Amiri" pitchFamily="2" charset="-78"/>
               </a:rPr>
               <a:t>شَدَّةٌ</a:t>
@@ -52230,11 +52456,12 @@
               <a:buNone/>
             </a:pPr>
             <a:r>
-              <a:rPr lang="ur-PK" altLang="en-US" sz="1400" b="1" dirty="0">
+              <a:rPr lang="ar-SA" altLang="en-US" sz="1400" b="1" dirty="0">
                 <a:solidFill>
                   <a:srgbClr val="2E8B57"/>
                 </a:solidFill>
                 <a:latin typeface="Amiri" pitchFamily="2" charset="-78"/>
+                <a:ea typeface="Amiri" pitchFamily="2" charset="-78"/>
                 <a:cs typeface="Amiri" pitchFamily="2" charset="-78"/>
               </a:rPr>
               <a:t>‎تشدید‎ </a:t>
@@ -52286,6 +52513,7 @@
                   <a:srgbClr val="1B3B6F"/>
                 </a:solidFill>
                 <a:latin typeface="Amiri" pitchFamily="2" charset="-78"/>
+                <a:ea typeface="Amiri" pitchFamily="2" charset="-78"/>
                 <a:cs typeface="Amiri" pitchFamily="2" charset="-78"/>
               </a:rPr>
               <a:t>تَنْوِينٌ</a:t>
@@ -52319,11 +52547,12 @@
               <a:buNone/>
             </a:pPr>
             <a:r>
-              <a:rPr lang="ur-PK" altLang="en-US" sz="1400" b="1" dirty="0">
+              <a:rPr lang="ar-SA" altLang="en-US" sz="1400" b="1" dirty="0">
                 <a:solidFill>
                   <a:srgbClr val="2E8B57"/>
                 </a:solidFill>
                 <a:latin typeface="Amiri" pitchFamily="2" charset="-78"/>
+                <a:ea typeface="Amiri" pitchFamily="2" charset="-78"/>
                 <a:cs typeface="Amiri" pitchFamily="2" charset="-78"/>
               </a:rPr>
               <a:t>‎تنوین‎ </a:t>
@@ -52375,6 +52604,7 @@
                   <a:srgbClr val="1B3B6F"/>
                 </a:solidFill>
                 <a:latin typeface="Amiri" pitchFamily="2" charset="-78"/>
+                <a:ea typeface="Amiri" pitchFamily="2" charset="-78"/>
                 <a:cs typeface="Amiri" pitchFamily="2" charset="-78"/>
               </a:rPr>
               <a:t>مَدٌّ</a:t>
@@ -52408,11 +52638,12 @@
               <a:buNone/>
             </a:pPr>
             <a:r>
-              <a:rPr lang="ur-PK" altLang="en-US" sz="1400" b="1" dirty="0">
+              <a:rPr lang="ar-SA" altLang="en-US" sz="1400" b="1" dirty="0">
                 <a:solidFill>
                   <a:srgbClr val="2E8B57"/>
                 </a:solidFill>
                 <a:latin typeface="Amiri" pitchFamily="2" charset="-78"/>
+                <a:ea typeface="Amiri" pitchFamily="2" charset="-78"/>
                 <a:cs typeface="Amiri" pitchFamily="2" charset="-78"/>
               </a:rPr>
               <a:t>‎مد‎ </a:t>
@@ -52464,6 +52695,7 @@
                   <a:srgbClr val="1B3B6F"/>
                 </a:solidFill>
                 <a:latin typeface="Amiri" pitchFamily="2" charset="-78"/>
+                <a:ea typeface="Amiri" pitchFamily="2" charset="-78"/>
                 <a:cs typeface="Amiri" pitchFamily="2" charset="-78"/>
               </a:rPr>
               <a:t>هَمْزَةٌ</a:t>
@@ -52497,11 +52729,12 @@
               <a:buNone/>
             </a:pPr>
             <a:r>
-              <a:rPr lang="ur-PK" altLang="en-US" sz="1400" b="1" dirty="0">
+              <a:rPr lang="ar-SA" altLang="en-US" sz="1400" b="1" dirty="0">
                 <a:solidFill>
                   <a:srgbClr val="2E8B57"/>
                 </a:solidFill>
                 <a:latin typeface="Amiri" pitchFamily="2" charset="-78"/>
+                <a:ea typeface="Amiri" pitchFamily="2" charset="-78"/>
                 <a:cs typeface="Amiri" pitchFamily="2" charset="-78"/>
               </a:rPr>
               <a:t>‎ہمزہ‎ </a:t>
@@ -52553,6 +52786,7 @@
                   <a:srgbClr val="1B3B6F"/>
                 </a:solidFill>
                 <a:latin typeface="Amiri" pitchFamily="2" charset="-78"/>
+                <a:ea typeface="Amiri" pitchFamily="2" charset="-78"/>
                 <a:cs typeface="Amiri" pitchFamily="2" charset="-78"/>
               </a:rPr>
               <a:t>قُرْآنٌ</a:t>
@@ -52586,11 +52820,12 @@
               <a:buNone/>
             </a:pPr>
             <a:r>
-              <a:rPr lang="ur-PK" altLang="en-US" sz="1400" b="1" dirty="0">
+              <a:rPr lang="ar-SA" altLang="en-US" sz="1400" b="1" dirty="0">
                 <a:solidFill>
                   <a:srgbClr val="2E8B57"/>
                 </a:solidFill>
                 <a:latin typeface="Amiri" pitchFamily="2" charset="-78"/>
+                <a:ea typeface="Amiri" pitchFamily="2" charset="-78"/>
                 <a:cs typeface="Amiri" pitchFamily="2" charset="-78"/>
               </a:rPr>
               <a:t>‎قرآن‎ </a:t>
@@ -52599,11 +52834,12 @@
               <a:buNone/>
             </a:pPr>
             <a:r>
-              <a:rPr lang="en-US" sz="950" b="1" dirty="0">
+              <a:rPr lang="ar-SA" sz="950" b="1" dirty="0">
                 <a:solidFill>
                   <a:srgbClr val="2E8B57"/>
                 </a:solidFill>
                 <a:latin typeface="Calibri" pitchFamily="34" charset="0"/>
+                <a:ea typeface="Amiri" pitchFamily="2" charset="-78"/>
                 <a:cs typeface="Amiri" pitchFamily="2" charset="-78"/>
               </a:rPr>
               <a:t> Qurʾān · Qur’an (has آ)</a:t>
@@ -52737,6 +52973,7 @@
                   <a:srgbClr val="D4AF37"/>
                 </a:solidFill>
                 <a:latin typeface="Amiri" pitchFamily="2" charset="-78"/>
+                <a:ea typeface="Amiri" pitchFamily="2" charset="-78"/>
                 <a:cs typeface="Amiri" pitchFamily="2" charset="-78"/>
               </a:rPr>
               <a:t>م</a:t>
@@ -53057,6 +53294,7 @@
                   <a:srgbClr val="8A6D1E"/>
                 </a:solidFill>
                 <a:latin typeface="Amiri" pitchFamily="2" charset="-78"/>
+                <a:ea typeface="Amiri" pitchFamily="2" charset="-78"/>
                 <a:cs typeface="Amiri" pitchFamily="2" charset="-78"/>
               </a:rPr>
               <a:t>الشَّدَّةُ</a:t>
@@ -53232,6 +53470,7 @@
                   <a:srgbClr val="8A6D1E"/>
                 </a:solidFill>
                 <a:latin typeface="Amiri" pitchFamily="2" charset="-78"/>
+                <a:ea typeface="Amiri" pitchFamily="2" charset="-78"/>
                 <a:cs typeface="Amiri" pitchFamily="2" charset="-78"/>
               </a:rPr>
               <a:t>رْ + رَ = رَّ</a:t>
@@ -53270,6 +53509,7 @@
                   <a:srgbClr val="1B3B6F"/>
                 </a:solidFill>
                 <a:latin typeface="Amiri" pitchFamily="2" charset="-78"/>
+                <a:ea typeface="Amiri" pitchFamily="2" charset="-78"/>
                 <a:cs typeface="Amiri" pitchFamily="2" charset="-78"/>
               </a:rPr>
               <a:t>رَّ</a:t>
@@ -53548,6 +53788,7 @@
                   <a:srgbClr val="1B3B6F"/>
                 </a:solidFill>
                 <a:latin typeface="Amiri" pitchFamily="2" charset="-78"/>
+                <a:ea typeface="Amiri" pitchFamily="2" charset="-78"/>
                 <a:cs typeface="Amiri" pitchFamily="2" charset="-78"/>
               </a:rPr>
               <a:t>دَرَسَ  ·  دَرَّسَ</a:t>
@@ -53826,6 +54067,7 @@
                   <a:srgbClr val="1B3B6F"/>
                 </a:solidFill>
                 <a:latin typeface="Amiri" pitchFamily="2" charset="-78"/>
+                <a:ea typeface="Amiri" pitchFamily="2" charset="-78"/>
                 <a:cs typeface="Amiri" pitchFamily="2" charset="-78"/>
               </a:rPr>
               <a:t>مُحَمَّدٌ</a:t>
@@ -53942,6 +54184,7 @@
                   <a:srgbClr val="1F2A37"/>
                 </a:solidFill>
                 <a:latin typeface="Amiri" pitchFamily="2" charset="-78"/>
+                <a:ea typeface="Amiri" pitchFamily="2" charset="-78"/>
                 <a:cs typeface="Amiri" pitchFamily="2" charset="-78"/>
               </a:rPr>
               <a:t>مَرَّ</a:t>
@@ -53968,6 +54211,7 @@
                   <a:srgbClr val="1F2A37"/>
                 </a:solidFill>
                 <a:latin typeface="Amiri" pitchFamily="2" charset="-78"/>
+                <a:ea typeface="Amiri" pitchFamily="2" charset="-78"/>
                 <a:cs typeface="Amiri" pitchFamily="2" charset="-78"/>
               </a:rPr>
               <a:t>حَقّ</a:t>
@@ -54114,6 +54358,7 @@
                   <a:srgbClr val="D4AF37"/>
                 </a:solidFill>
                 <a:latin typeface="Amiri" pitchFamily="2" charset="-78"/>
+                <a:ea typeface="Amiri" pitchFamily="2" charset="-78"/>
                 <a:cs typeface="Amiri" pitchFamily="2" charset="-78"/>
               </a:rPr>
               <a:t>م</a:t>
@@ -54434,6 +54679,7 @@
                   <a:srgbClr val="8A6D1E"/>
                 </a:solidFill>
                 <a:latin typeface="Amiri" pitchFamily="2" charset="-78"/>
+                <a:ea typeface="Amiri" pitchFamily="2" charset="-78"/>
                 <a:cs typeface="Amiri" pitchFamily="2" charset="-78"/>
               </a:rPr>
               <a:t>التَّنْوِينُ</a:t>
@@ -54790,6 +55036,7 @@
                   <a:srgbClr val="1B3B6F"/>
                 </a:solidFill>
                 <a:latin typeface="Amiri" pitchFamily="2" charset="-78"/>
+                <a:ea typeface="Amiri" pitchFamily="2" charset="-78"/>
                 <a:cs typeface="Amiri" pitchFamily="2" charset="-78"/>
               </a:rPr>
               <a:t>ـٌ</a:t>
@@ -54866,6 +55113,7 @@
                   <a:srgbClr val="1B3B6F"/>
                 </a:solidFill>
                 <a:latin typeface="Amiri" pitchFamily="2" charset="-78"/>
+                <a:ea typeface="Amiri" pitchFamily="2" charset="-78"/>
                 <a:cs typeface="Amiri" pitchFamily="2" charset="-78"/>
               </a:rPr>
               <a:t>كِتَابٌ</a:t>
@@ -55072,6 +55320,7 @@
                   <a:srgbClr val="1B3B6F"/>
                 </a:solidFill>
                 <a:latin typeface="Amiri" pitchFamily="2" charset="-78"/>
+                <a:ea typeface="Amiri" pitchFamily="2" charset="-78"/>
                 <a:cs typeface="Amiri" pitchFamily="2" charset="-78"/>
               </a:rPr>
               <a:t>ـٍ</a:t>
@@ -55148,6 +55397,7 @@
                   <a:srgbClr val="1B3B6F"/>
                 </a:solidFill>
                 <a:latin typeface="Amiri" pitchFamily="2" charset="-78"/>
+                <a:ea typeface="Amiri" pitchFamily="2" charset="-78"/>
                 <a:cs typeface="Amiri" pitchFamily="2" charset="-78"/>
               </a:rPr>
               <a:t>كِتَابٍ</a:t>
@@ -55354,6 +55604,7 @@
                   <a:srgbClr val="1B3B6F"/>
                 </a:solidFill>
                 <a:latin typeface="Amiri" pitchFamily="2" charset="-78"/>
+                <a:ea typeface="Amiri" pitchFamily="2" charset="-78"/>
                 <a:cs typeface="Amiri" pitchFamily="2" charset="-78"/>
               </a:rPr>
               <a:t>ـً</a:t>
@@ -55430,6 +55681,7 @@
                   <a:srgbClr val="1B3B6F"/>
                 </a:solidFill>
                 <a:latin typeface="Amiri" pitchFamily="2" charset="-78"/>
+                <a:ea typeface="Amiri" pitchFamily="2" charset="-78"/>
                 <a:cs typeface="Amiri" pitchFamily="2" charset="-78"/>
               </a:rPr>
               <a:t>كِتَابًا</a:t>
@@ -55611,6 +55863,7 @@
                   <a:srgbClr val="5A6472"/>
                 </a:solidFill>
                 <a:latin typeface="Amiri" pitchFamily="2" charset="-78"/>
+                <a:ea typeface="Amiri" pitchFamily="2" charset="-78"/>
                 <a:cs typeface="Amiri" pitchFamily="2" charset="-78"/>
               </a:rPr>
               <a:t>الـ</a:t>
@@ -55738,6 +55991,7 @@
                   <a:srgbClr val="1B3B6F"/>
                 </a:solidFill>
                 <a:latin typeface="Amiri" pitchFamily="2" charset="-78"/>
+                <a:ea typeface="Amiri" pitchFamily="2" charset="-78"/>
                 <a:cs typeface="Amiri" pitchFamily="2" charset="-78"/>
               </a:rPr>
               <a:t>الكِتَابُ</a:t>
@@ -55874,13 +56128,9 @@
     <a:fontScheme name="Office">
       <a:majorFont>
         <a:latin typeface="Calibri Light" panose="020F0302020204030204"/>
-        <a:ea typeface=""/>
-        <a:cs typeface=""/>
-        <a:font script="Jpan" typeface="游ゴシック Light"/>
-        <a:font script="Hang" typeface="맑은 고딕"/>
-        <a:font script="Hans" typeface="等线 Light"/>
-        <a:font script="Hant" typeface="新細明體"/>
-        <a:font script="Arab" typeface="Times New Roman"/>
+        <a:ea typeface="Amiri" pitchFamily="2" charset="-78"/>
+        <a:cs typeface="Amiri" pitchFamily="2" charset="-78"/>
+        <a:font script="Arab" typeface="Amiri"/>
         <a:font script="Hebr" typeface="Times New Roman"/>
         <a:font script="Thai" typeface="Angsana New"/>
         <a:font script="Ethi" typeface="Nyala"/>
@@ -55926,13 +56176,9 @@
       </a:majorFont>
       <a:minorFont>
         <a:latin typeface="Calibri" panose="020F0502020204030204"/>
-        <a:ea typeface=""/>
-        <a:cs typeface=""/>
-        <a:font script="Jpan" typeface="游ゴシック"/>
-        <a:font script="Hang" typeface="맑은 고딕"/>
-        <a:font script="Hans" typeface="等线"/>
-        <a:font script="Hant" typeface="新細明體"/>
-        <a:font script="Arab" typeface="Arial"/>
+        <a:ea typeface="Amiri" pitchFamily="2" charset="-78"/>
+        <a:cs typeface="Amiri" pitchFamily="2" charset="-78"/>
+        <a:font script="Arab" typeface="Amiri"/>
         <a:font script="Hebr" typeface="Arial"/>
         <a:font script="Thai" typeface="Cordia New"/>
         <a:font script="Ethi" typeface="Nyala"/>
